--- a/output/sections/02-背景与目标.pptx
+++ b/output/sections/02-背景与目标.pptx
@@ -2,15 +2,15 @@
 <file path=ppt/presentation.xml><?xml version="1.0" encoding="utf-8"?>
 <p:presentation xmlns:p="http://schemas.openxmlformats.org/presentationml/2006/main">
   <p:sldMasterIdLst>
-    <p:sldMasterId xmlns:r="http://schemas.openxmlformats.org/officeDocument/2006/relationships" id="2147483648" r:id="Rf4d8a04cc7a34185"/>
+    <p:sldMasterId xmlns:r="http://schemas.openxmlformats.org/officeDocument/2006/relationships" id="2147483648" r:id="R1e1a599834b341dd"/>
   </p:sldMasterIdLst>
   <p:notesMasterIdLst>
-    <p:notesMasterId xmlns:r="http://schemas.openxmlformats.org/officeDocument/2006/relationships" r:id="R0d275baf021a404f"/>
+    <p:notesMasterId xmlns:r="http://schemas.openxmlformats.org/officeDocument/2006/relationships" r:id="R519181d0e78044a4"/>
   </p:notesMasterIdLst>
   <p:sldIdLst>
-    <p:sldId xmlns:r="http://schemas.openxmlformats.org/officeDocument/2006/relationships" id="256" r:id="Re56000f9d23d4350"/>
-    <p:sldId xmlns:r="http://schemas.openxmlformats.org/officeDocument/2006/relationships" id="257" r:id="Rb3afbdceff554fd8"/>
-    <p:sldId xmlns:r="http://schemas.openxmlformats.org/officeDocument/2006/relationships" id="258" r:id="R38c603ea01d94622"/>
+    <p:sldId xmlns:r="http://schemas.openxmlformats.org/officeDocument/2006/relationships" id="256" r:id="R8728c5c68a684c93"/>
+    <p:sldId xmlns:r="http://schemas.openxmlformats.org/officeDocument/2006/relationships" id="257" r:id="R8b7338775dd043de"/>
+    <p:sldId xmlns:r="http://schemas.openxmlformats.org/officeDocument/2006/relationships" id="258" r:id="R37a8e35bd471494b"/>
   </p:sldIdLst>
   <p:sldSz cx="12192000" cy="6858000"/>
   <p:notesSz cx="6858000" cy="9144000"/>
@@ -735,7 +735,7 @@
   </p:cSld>
   <p:clrMap bg1="lt1" tx1="dk1" bg2="lt2" tx2="dk2" accent1="accent1" accent2="accent2" accent3="accent3" accent4="accent4" accent5="accent5" accent6="accent6" hlink="hlink" folHlink="folHlink"/>
   <p:sldLayoutIdLst>
-    <p:sldLayoutId xmlns:r="http://schemas.openxmlformats.org/officeDocument/2006/relationships" id="2147483649" r:id="R111e85c30bf2467e"/>
+    <p:sldLayoutId xmlns:r="http://schemas.openxmlformats.org/officeDocument/2006/relationships" id="2147483649" r:id="Ra89521422b694841"/>
   </p:sldLayoutIdLst>
   <p:txStyles>
     <p:titleStyle>
@@ -1290,7 +1290,7 @@
           <p:nvPr/>
         </p:nvPicPr>
         <p:blipFill>
-          <a:blip xmlns:r="http://schemas.openxmlformats.org/officeDocument/2006/relationships" xmlns:a="http://schemas.openxmlformats.org/drawingml/2006/main" r:embed="R486686c69f8d460a"/>
+          <a:blip xmlns:r="http://schemas.openxmlformats.org/officeDocument/2006/relationships" xmlns:a="http://schemas.openxmlformats.org/drawingml/2006/main" r:embed="R2fc82637dad3410b"/>
           <a:srcRect xmlns:a="http://schemas.openxmlformats.org/drawingml/2006/main" l="0" t="21875" r="0" b="21875"/>
           <a:stretch xmlns:a="http://schemas.openxmlformats.org/drawingml/2006/main">
             <a:fillRect l="0" t="0" r="0" b="0"/>
@@ -1311,7 +1311,7 @@
           <p:cNvPr id="2" name="">
             <a:extLst xmlns:a="http://schemas.openxmlformats.org/drawingml/2006/main">
               <a:ext uri="{FF2B5EF4-FFF2-40B4-BE49-F238E27FC236}">
-                <a16:creationId xmlns:a16="http://schemas.microsoft.com/office/drawing/2014/main" id="{9A14D0AF-3C9B-46C2-A568-7C6552764CC1}"/>
+                <a16:creationId xmlns:a16="http://schemas.microsoft.com/office/drawing/2014/main" id="{F308129E-CE3B-4895-A760-769001211089}"/>
               </a:ext>
             </a:extLst>
           </p:cNvPr>
@@ -1344,7 +1344,7 @@
           <p:cNvPr id="3" name="">
             <a:extLst xmlns:a="http://schemas.openxmlformats.org/drawingml/2006/main">
               <a:ext uri="{FF2B5EF4-FFF2-40B4-BE49-F238E27FC236}">
-                <a16:creationId xmlns:a16="http://schemas.microsoft.com/office/drawing/2014/main" id="{929D3848-C610-4903-96F3-960BDA36065A}"/>
+                <a16:creationId xmlns:a16="http://schemas.microsoft.com/office/drawing/2014/main" id="{0755D4E6-CF12-4301-95EF-6DDF2F8DF323}"/>
               </a:ext>
             </a:extLst>
           </p:cNvPr>
@@ -1379,7 +1379,7 @@
           <p:nvPr/>
         </p:nvPicPr>
         <p:blipFill>
-          <a:blip xmlns:r="http://schemas.openxmlformats.org/officeDocument/2006/relationships" xmlns:a="http://schemas.openxmlformats.org/drawingml/2006/main" r:embed="Reae8ba9fe6e74704"/>
+          <a:blip xmlns:r="http://schemas.openxmlformats.org/officeDocument/2006/relationships" xmlns:a="http://schemas.openxmlformats.org/drawingml/2006/main" r:embed="R10fb8aafc5374981"/>
           <a:stretch xmlns:a="http://schemas.openxmlformats.org/drawingml/2006/main"/>
         </p:blipFill>
         <p:spPr>
@@ -1397,7 +1397,7 @@
           <p:cNvPr id="5" name="">
             <a:extLst xmlns:a="http://schemas.openxmlformats.org/drawingml/2006/main">
               <a:ext uri="{FF2B5EF4-FFF2-40B4-BE49-F238E27FC236}">
-                <a16:creationId xmlns:a16="http://schemas.microsoft.com/office/drawing/2014/main" id="{F3C4E481-8B94-4920-977F-15A8D5EE3A3B}"/>
+                <a16:creationId xmlns:a16="http://schemas.microsoft.com/office/drawing/2014/main" id="{FF20DD8C-67AB-4BF0-AE7F-DAC38CC53E25}"/>
               </a:ext>
             </a:extLst>
           </p:cNvPr>
@@ -1453,7 +1453,7 @@
           <p:cNvPr id="6" name="">
             <a:extLst xmlns:a="http://schemas.openxmlformats.org/drawingml/2006/main">
               <a:ext uri="{FF2B5EF4-FFF2-40B4-BE49-F238E27FC236}">
-                <a16:creationId xmlns:a16="http://schemas.microsoft.com/office/drawing/2014/main" id="{BD36BE4E-EC7E-4771-B227-C8B409A167F3}"/>
+                <a16:creationId xmlns:a16="http://schemas.microsoft.com/office/drawing/2014/main" id="{76926759-1B15-4150-9D28-60414D5491D6}"/>
               </a:ext>
             </a:extLst>
           </p:cNvPr>
@@ -1509,7 +1509,7 @@
           <p:cNvPr id="7" name="">
             <a:extLst xmlns:a="http://schemas.openxmlformats.org/drawingml/2006/main">
               <a:ext uri="{FF2B5EF4-FFF2-40B4-BE49-F238E27FC236}">
-                <a16:creationId xmlns:a16="http://schemas.microsoft.com/office/drawing/2014/main" id="{4F1B5BB3-50B6-43A4-B7A1-70E5409AE9B9}"/>
+                <a16:creationId xmlns:a16="http://schemas.microsoft.com/office/drawing/2014/main" id="{3BA1C769-8ACB-428B-AF4C-F318B3E8061E}"/>
               </a:ext>
             </a:extLst>
           </p:cNvPr>
@@ -1565,7 +1565,7 @@
           <p:cNvPr id="8" name="">
             <a:extLst xmlns:a="http://schemas.openxmlformats.org/drawingml/2006/main">
               <a:ext uri="{FF2B5EF4-FFF2-40B4-BE49-F238E27FC236}">
-                <a16:creationId xmlns:a16="http://schemas.microsoft.com/office/drawing/2014/main" id="{D9E6282F-2B25-4711-B24B-7AE663FA9C7C}"/>
+                <a16:creationId xmlns:a16="http://schemas.microsoft.com/office/drawing/2014/main" id="{97F2FBF2-49D8-48E8-BF60-CF3F36A705F7}"/>
               </a:ext>
             </a:extLst>
           </p:cNvPr>
@@ -1611,7 +1611,7 @@
                 <a:ea typeface="PingFang SC"/>
                 <a:cs typeface="PingFang SC"/>
               </a:rPr>
-              <a:t>优化背景 | 问题与挑战 | 优化方案</a:t>
+              <a:t>优化背景 | 总体目标 | 问题与挑战</a:t>
             </a:r>
           </a:p>
         </p:txBody>
@@ -1621,7 +1621,7 @@
           <p:cNvPr id="9" name="">
             <a:extLst xmlns:a="http://schemas.openxmlformats.org/drawingml/2006/main">
               <a:ext uri="{FF2B5EF4-FFF2-40B4-BE49-F238E27FC236}">
-                <a16:creationId xmlns:a16="http://schemas.microsoft.com/office/drawing/2014/main" id="{0DC121F4-C5DC-465B-86C7-E204E82ED638}"/>
+                <a16:creationId xmlns:a16="http://schemas.microsoft.com/office/drawing/2014/main" id="{3ACC4B9D-A9CC-4316-8303-FB9E316A3505}"/>
               </a:ext>
             </a:extLst>
           </p:cNvPr>
@@ -1652,7 +1652,7 @@
           <p:cNvPr id="10" name="">
             <a:extLst xmlns:a="http://schemas.openxmlformats.org/drawingml/2006/main">
               <a:ext uri="{FF2B5EF4-FFF2-40B4-BE49-F238E27FC236}">
-                <a16:creationId xmlns:a16="http://schemas.microsoft.com/office/drawing/2014/main" id="{D00D2226-2F5E-485C-95AE-94F91A9F8CB7}"/>
+                <a16:creationId xmlns:a16="http://schemas.microsoft.com/office/drawing/2014/main" id="{B8723D1C-6FEE-4D59-880B-76CB1E672AA9}"/>
               </a:ext>
             </a:extLst>
           </p:cNvPr>
@@ -1706,7 +1706,7 @@
     </p:spTree>
     <p:extLst>
       <p:ext uri="{BB962C8B-B14F-4D97-AF65-F5344CB8AC3E}">
-        <p14:creationId xmlns:p14="http://schemas.microsoft.com/office/powerpoint/2010/main" val="1557896016"/>
+        <p14:creationId xmlns:p14="http://schemas.microsoft.com/office/powerpoint/2010/main" val="801675706"/>
       </p:ext>
     </p:extLst>
   </p:cSld>
@@ -1741,7 +1741,7 @@
           <p:nvPr/>
         </p:nvPicPr>
         <p:blipFill>
-          <a:blip xmlns:r="http://schemas.openxmlformats.org/officeDocument/2006/relationships" xmlns:a="http://schemas.openxmlformats.org/drawingml/2006/main" r:embed="Rd49b391eabaf427d"/>
+          <a:blip xmlns:r="http://schemas.openxmlformats.org/officeDocument/2006/relationships" xmlns:a="http://schemas.openxmlformats.org/drawingml/2006/main" r:embed="Rf32b217d445b4998"/>
           <a:stretch xmlns:a="http://schemas.openxmlformats.org/drawingml/2006/main"/>
         </p:blipFill>
         <p:spPr>
@@ -2280,7 +2280,7 @@
                 <a:ea typeface="PingFang SC"/>
                 <a:cs typeface="PingFang SC"/>
               </a:rPr>
-              <a:t>业务需要探索第三条技术路线</a:t>
+              <a:t>推荐/搜索成为核心交互，需要补齐两类路线的短板</a:t>
             </a:r>
           </a:p>
         </p:txBody>
@@ -2337,7 +2337,7 @@
                 <a:ea typeface="PingFang SC"/>
                 <a:cs typeface="PingFang SC"/>
               </a:rPr>
-              <a:t>现有两条技术路线的结构性短板：</a:t>
+              <a:t>现有两条技术路线各有优势，但都难以同时满足业务要求：</a:t>
             </a:r>
           </a:p>
         </p:txBody>
@@ -2492,7 +2492,7 @@
                 <a:ea typeface="PingFang SC"/>
                 <a:cs typeface="PingFang SC"/>
               </a:rPr>
-              <a:t>• 解释强、检索精度高</a:t>
+              <a:t>• 决策显式，可解释性强</a:t>
             </a:r>
           </a:p>
           <a:p xmlns:a="http://schemas.openxmlformats.org/drawingml/2006/main">
@@ -2516,7 +2516,7 @@
                 <a:ea typeface="PingFang SC"/>
                 <a:cs typeface="PingFang SC"/>
               </a:rPr>
-              <a:t>• 多轮模型调用，端到端时延秒级/十秒级</a:t>
+              <a:t>• 多轮调用，秒级/十秒级时延</a:t>
             </a:r>
           </a:p>
         </p:txBody>
@@ -2614,7 +2614,7 @@
                 <a:ea typeface="PingFang SC"/>
                 <a:cs typeface="PingFang SC"/>
               </a:rPr>
-              <a:t>路线二：传统判别推荐</a:t>
+              <a:t>路线二：判别式推荐系统</a:t>
             </a:r>
           </a:p>
         </p:txBody>
@@ -2695,7 +2695,7 @@
                 <a:ea typeface="PingFang SC"/>
                 <a:cs typeface="PingFang SC"/>
               </a:rPr>
-              <a:t>• 黑盒系统，缺乏推荐解释</a:t>
+              <a:t>• 黑盒打分，缺少可审查解释</a:t>
             </a:r>
           </a:p>
         </p:txBody>
@@ -2907,7 +2907,7 @@
                 <a:ea typeface="PingFang SC"/>
                 <a:cs typeface="PingFang SC"/>
               </a:rPr>
-              <a:t>在满足在线时延约束的前提下，提供具备一定忠实性的推荐解释</a:t>
+              <a:t>在线时延约束下，提供具备一定忠实性的推荐解释</a:t>
             </a:r>
           </a:p>
           <a:p xmlns:a="http://schemas.openxmlformats.org/drawingml/2006/main">
@@ -2931,7 +2931,7 @@
                 <a:ea typeface="PingFang SC"/>
                 <a:cs typeface="PingFang SC"/>
               </a:rPr>
-              <a:t>将对话、推理与生成式推荐统一于单一模型，同时提升推荐精度与可解释性</a:t>
+              <a:t>参照 OneRec-Think / OneReason，将推理与推荐统一到单一模型</a:t>
             </a:r>
           </a:p>
         </p:txBody>
@@ -2986,7 +2986,7 @@
           <p:nvPr/>
         </p:nvPicPr>
         <p:blipFill>
-          <a:blip xmlns:r="http://schemas.openxmlformats.org/officeDocument/2006/relationships" xmlns:a="http://schemas.openxmlformats.org/drawingml/2006/main" r:embed="Rb11fdc27dc9745ec"/>
+          <a:blip xmlns:r="http://schemas.openxmlformats.org/officeDocument/2006/relationships" xmlns:a="http://schemas.openxmlformats.org/drawingml/2006/main" r:embed="R3749019976a8475c"/>
           <a:stretch xmlns:a="http://schemas.openxmlformats.org/drawingml/2006/main"/>
         </p:blipFill>
         <p:spPr>
@@ -3051,7 +3051,7 @@
                 <a:ea typeface="PingFang SC"/>
                 <a:cs typeface="PingFang SC"/>
               </a:rPr>
-              <a:t>OneRec 研究路线：预训练、后训练、评估闭环</a:t>
+              <a:t>OneRec 参照：显式推理、时延优化、评估闭环</a:t>
             </a:r>
           </a:p>
         </p:txBody>
@@ -3094,7 +3094,7 @@
           <p:nvPr/>
         </p:nvPicPr>
         <p:blipFill>
-          <a:blip xmlns:r="http://schemas.openxmlformats.org/officeDocument/2006/relationships" xmlns:a="http://schemas.openxmlformats.org/drawingml/2006/main" r:embed="R402f36c51e5a49a2"/>
+          <a:blip xmlns:r="http://schemas.openxmlformats.org/officeDocument/2006/relationships" xmlns:a="http://schemas.openxmlformats.org/drawingml/2006/main" r:embed="R7d186bf0ae9a448a"/>
           <a:stretch xmlns:a="http://schemas.openxmlformats.org/drawingml/2006/main"/>
         </p:blipFill>
         <p:spPr>
@@ -3400,7 +3400,7 @@
                 <a:ea typeface="PingFang SC"/>
                 <a:cs typeface="PingFang SC"/>
               </a:rPr>
-              <a:t>背景与目标 | 一个模型，多种教育场景</a:t>
+              <a:t>背景与目标 | 教育 OneRec 基座模型</a:t>
             </a:r>
           </a:p>
         </p:txBody>
@@ -3602,7 +3602,7 @@
                 <a:ea typeface="PingFang SC"/>
                 <a:cs typeface="PingFang SC"/>
               </a:rPr>
-              <a:t>以通用 LLM 为底座，注入 Item 语义理解与生成式推荐能力，通过指令适配推荐、搜索和题目理解。</a:t>
+              <a:t>以通用 LLM 为底座，在不损失通用对话与推理能力的前提下，注入 Item 语义理解与生成式推荐能力。</a:t>
             </a:r>
           </a:p>
         </p:txBody>
@@ -3819,7 +3819,7 @@
                 <a:ea typeface="PingFang SC"/>
                 <a:cs typeface="PingFang SC"/>
               </a:rPr>
-              <a:t>灾难性遗忘</a:t>
+              <a:t>模型侧：能力注入与遗忘控制</a:t>
             </a:r>
           </a:p>
         </p:txBody>
@@ -3876,7 +3876,7 @@
                 <a:ea typeface="PingFang SC"/>
                 <a:cs typeface="PingFang SC"/>
               </a:rPr>
-              <a:t>学会推荐的同时，不丢通用能力和 SID 对齐</a:t>
+              <a:t>保持通用能力，并抑制 text &lt;-&gt; SID 跨训练阶段遗忘</a:t>
             </a:r>
           </a:p>
         </p:txBody>
@@ -4093,7 +4093,7 @@
                 <a:ea typeface="PingFang SC"/>
                 <a:cs typeface="PingFang SC"/>
               </a:rPr>
-              <a:t>任务互扰与隔离</a:t>
+              <a:t>应用侧：多任务互扰与部署隔离</a:t>
             </a:r>
           </a:p>
         </p:txBody>
@@ -4150,7 +4150,7 @@
                 <a:ea typeface="PingFang SC"/>
                 <a:cs typeface="PingFang SC"/>
               </a:rPr>
-              <a:t>一个模型干多种活，训练和上线都要互不牵连</a:t>
+              <a:t>训练抑制负迁移，推理防止串扰，上线要有回归与兜底</a:t>
             </a:r>
           </a:p>
         </p:txBody>
@@ -4367,7 +4367,7 @@
                 <a:ea typeface="PingFang SC"/>
                 <a:cs typeface="PingFang SC"/>
               </a:rPr>
-              <a:t>推荐质量度量</a:t>
+              <a:t>业务侧：无反馈条件下的监督与度量</a:t>
             </a:r>
           </a:p>
         </p:txBody>
@@ -4424,7 +4424,7 @@
                 <a:ea typeface="PingFang SC"/>
                 <a:cs typeface="PingFang SC"/>
               </a:rPr>
-              <a:t>冷启动缺少真实反馈，必须构造可靠监督与评估</a:t>
+              <a:t>冷启动缺少真实行为反馈，需要代理监督与评估体系</a:t>
             </a:r>
           </a:p>
         </p:txBody>
@@ -4641,7 +4641,7 @@
                 <a:ea typeface="PingFang SC"/>
                 <a:cs typeface="PingFang SC"/>
               </a:rPr>
-              <a:t>工程落地</a:t>
+              <a:t>工程侧：推理成本与增量更新</a:t>
             </a:r>
           </a:p>
         </p:txBody>
@@ -4698,7 +4698,7 @@
                 <a:ea typeface="PingFang SC"/>
                 <a:cs typeface="PingFang SC"/>
               </a:rPr>
-              <a:t>显式 CoT 慢且贵，新内容还要持续入库</a:t>
+              <a:t>在时延 SLA 下重设计推理，并支撑 SID 与候选池增量更新</a:t>
             </a:r>
           </a:p>
         </p:txBody>
@@ -4755,7 +4755,7 @@
                 <a:ea typeface="PingFang SC"/>
                 <a:cs typeface="PingFang SC"/>
               </a:rPr>
-              <a:t>核心判断：不是先做一个推荐模型，而是先搭出可训练、可约束、可评估的生产链路。</a:t>
+              <a:t>核心判断：目标不是单点推荐模型，而是面向推荐、搜索、题目理解的统一能力底座。</a:t>
             </a:r>
           </a:p>
         </p:txBody>

--- a/output/sections/02-背景与目标.pptx
+++ b/output/sections/02-背景与目标.pptx
@@ -2,15 +2,15 @@
 <file path=ppt/presentation.xml><?xml version="1.0" encoding="utf-8"?>
 <p:presentation xmlns:p="http://schemas.openxmlformats.org/presentationml/2006/main">
   <p:sldMasterIdLst>
-    <p:sldMasterId xmlns:r="http://schemas.openxmlformats.org/officeDocument/2006/relationships" id="2147483648" r:id="R1e1a599834b341dd"/>
+    <p:sldMasterId xmlns:r="http://schemas.openxmlformats.org/officeDocument/2006/relationships" id="2147483648" r:id="R314d2c53b2d3463b"/>
   </p:sldMasterIdLst>
   <p:notesMasterIdLst>
-    <p:notesMasterId xmlns:r="http://schemas.openxmlformats.org/officeDocument/2006/relationships" r:id="R519181d0e78044a4"/>
+    <p:notesMasterId xmlns:r="http://schemas.openxmlformats.org/officeDocument/2006/relationships" r:id="Rb56c637435f54d1e"/>
   </p:notesMasterIdLst>
   <p:sldIdLst>
-    <p:sldId xmlns:r="http://schemas.openxmlformats.org/officeDocument/2006/relationships" id="256" r:id="R8728c5c68a684c93"/>
-    <p:sldId xmlns:r="http://schemas.openxmlformats.org/officeDocument/2006/relationships" id="257" r:id="R8b7338775dd043de"/>
-    <p:sldId xmlns:r="http://schemas.openxmlformats.org/officeDocument/2006/relationships" id="258" r:id="R37a8e35bd471494b"/>
+    <p:sldId xmlns:r="http://schemas.openxmlformats.org/officeDocument/2006/relationships" id="256" r:id="R418117ac1e0b49b3"/>
+    <p:sldId xmlns:r="http://schemas.openxmlformats.org/officeDocument/2006/relationships" id="257" r:id="Rd3d2f0bcf7a04cee"/>
+    <p:sldId xmlns:r="http://schemas.openxmlformats.org/officeDocument/2006/relationships" id="258" r:id="R077f42e778df442b"/>
   </p:sldIdLst>
   <p:sldSz cx="12192000" cy="6858000"/>
   <p:notesSz cx="6858000" cy="9144000"/>
@@ -735,7 +735,7 @@
   </p:cSld>
   <p:clrMap bg1="lt1" tx1="dk1" bg2="lt2" tx2="dk2" accent1="accent1" accent2="accent2" accent3="accent3" accent4="accent4" accent5="accent5" accent6="accent6" hlink="hlink" folHlink="folHlink"/>
   <p:sldLayoutIdLst>
-    <p:sldLayoutId xmlns:r="http://schemas.openxmlformats.org/officeDocument/2006/relationships" id="2147483649" r:id="Ra89521422b694841"/>
+    <p:sldLayoutId xmlns:r="http://schemas.openxmlformats.org/officeDocument/2006/relationships" id="2147483649" r:id="Rb375b453988d4042"/>
   </p:sldLayoutIdLst>
   <p:txStyles>
     <p:titleStyle>
@@ -1290,7 +1290,7 @@
           <p:nvPr/>
         </p:nvPicPr>
         <p:blipFill>
-          <a:blip xmlns:r="http://schemas.openxmlformats.org/officeDocument/2006/relationships" xmlns:a="http://schemas.openxmlformats.org/drawingml/2006/main" r:embed="R2fc82637dad3410b"/>
+          <a:blip xmlns:r="http://schemas.openxmlformats.org/officeDocument/2006/relationships" xmlns:a="http://schemas.openxmlformats.org/drawingml/2006/main" r:embed="Rf5f953c230f34114"/>
           <a:srcRect xmlns:a="http://schemas.openxmlformats.org/drawingml/2006/main" l="0" t="21875" r="0" b="21875"/>
           <a:stretch xmlns:a="http://schemas.openxmlformats.org/drawingml/2006/main">
             <a:fillRect l="0" t="0" r="0" b="0"/>
@@ -1311,7 +1311,7 @@
           <p:cNvPr id="2" name="">
             <a:extLst xmlns:a="http://schemas.openxmlformats.org/drawingml/2006/main">
               <a:ext uri="{FF2B5EF4-FFF2-40B4-BE49-F238E27FC236}">
-                <a16:creationId xmlns:a16="http://schemas.microsoft.com/office/drawing/2014/main" id="{F308129E-CE3B-4895-A760-769001211089}"/>
+                <a16:creationId xmlns:a16="http://schemas.microsoft.com/office/drawing/2014/main" id="{5D392D79-F17E-4C89-9820-9CE5CE1FC292}"/>
               </a:ext>
             </a:extLst>
           </p:cNvPr>
@@ -1344,7 +1344,7 @@
           <p:cNvPr id="3" name="">
             <a:extLst xmlns:a="http://schemas.openxmlformats.org/drawingml/2006/main">
               <a:ext uri="{FF2B5EF4-FFF2-40B4-BE49-F238E27FC236}">
-                <a16:creationId xmlns:a16="http://schemas.microsoft.com/office/drawing/2014/main" id="{0755D4E6-CF12-4301-95EF-6DDF2F8DF323}"/>
+                <a16:creationId xmlns:a16="http://schemas.microsoft.com/office/drawing/2014/main" id="{D76AF702-BAC6-4795-A9E1-373F82578243}"/>
               </a:ext>
             </a:extLst>
           </p:cNvPr>
@@ -1379,7 +1379,7 @@
           <p:nvPr/>
         </p:nvPicPr>
         <p:blipFill>
-          <a:blip xmlns:r="http://schemas.openxmlformats.org/officeDocument/2006/relationships" xmlns:a="http://schemas.openxmlformats.org/drawingml/2006/main" r:embed="R10fb8aafc5374981"/>
+          <a:blip xmlns:r="http://schemas.openxmlformats.org/officeDocument/2006/relationships" xmlns:a="http://schemas.openxmlformats.org/drawingml/2006/main" r:embed="R88c2aaec19de4b6d"/>
           <a:stretch xmlns:a="http://schemas.openxmlformats.org/drawingml/2006/main"/>
         </p:blipFill>
         <p:spPr>
@@ -1397,7 +1397,7 @@
           <p:cNvPr id="5" name="">
             <a:extLst xmlns:a="http://schemas.openxmlformats.org/drawingml/2006/main">
               <a:ext uri="{FF2B5EF4-FFF2-40B4-BE49-F238E27FC236}">
-                <a16:creationId xmlns:a16="http://schemas.microsoft.com/office/drawing/2014/main" id="{FF20DD8C-67AB-4BF0-AE7F-DAC38CC53E25}"/>
+                <a16:creationId xmlns:a16="http://schemas.microsoft.com/office/drawing/2014/main" id="{378F688B-CE6B-47FA-9B8E-4AE0CBFB9D20}"/>
               </a:ext>
             </a:extLst>
           </p:cNvPr>
@@ -1453,7 +1453,7 @@
           <p:cNvPr id="6" name="">
             <a:extLst xmlns:a="http://schemas.openxmlformats.org/drawingml/2006/main">
               <a:ext uri="{FF2B5EF4-FFF2-40B4-BE49-F238E27FC236}">
-                <a16:creationId xmlns:a16="http://schemas.microsoft.com/office/drawing/2014/main" id="{76926759-1B15-4150-9D28-60414D5491D6}"/>
+                <a16:creationId xmlns:a16="http://schemas.microsoft.com/office/drawing/2014/main" id="{9F2C8053-9A93-4C78-8874-A0D31824EE10}"/>
               </a:ext>
             </a:extLst>
           </p:cNvPr>
@@ -1509,7 +1509,7 @@
           <p:cNvPr id="7" name="">
             <a:extLst xmlns:a="http://schemas.openxmlformats.org/drawingml/2006/main">
               <a:ext uri="{FF2B5EF4-FFF2-40B4-BE49-F238E27FC236}">
-                <a16:creationId xmlns:a16="http://schemas.microsoft.com/office/drawing/2014/main" id="{3BA1C769-8ACB-428B-AF4C-F318B3E8061E}"/>
+                <a16:creationId xmlns:a16="http://schemas.microsoft.com/office/drawing/2014/main" id="{0B528483-87B3-4E84-AEE0-BF6F344A920E}"/>
               </a:ext>
             </a:extLst>
           </p:cNvPr>
@@ -1565,7 +1565,7 @@
           <p:cNvPr id="8" name="">
             <a:extLst xmlns:a="http://schemas.openxmlformats.org/drawingml/2006/main">
               <a:ext uri="{FF2B5EF4-FFF2-40B4-BE49-F238E27FC236}">
-                <a16:creationId xmlns:a16="http://schemas.microsoft.com/office/drawing/2014/main" id="{97F2FBF2-49D8-48E8-BF60-CF3F36A705F7}"/>
+                <a16:creationId xmlns:a16="http://schemas.microsoft.com/office/drawing/2014/main" id="{2A91450C-DCEA-41E1-8CBF-FC3D78F064BD}"/>
               </a:ext>
             </a:extLst>
           </p:cNvPr>
@@ -1621,7 +1621,7 @@
           <p:cNvPr id="9" name="">
             <a:extLst xmlns:a="http://schemas.openxmlformats.org/drawingml/2006/main">
               <a:ext uri="{FF2B5EF4-FFF2-40B4-BE49-F238E27FC236}">
-                <a16:creationId xmlns:a16="http://schemas.microsoft.com/office/drawing/2014/main" id="{3ACC4B9D-A9CC-4316-8303-FB9E316A3505}"/>
+                <a16:creationId xmlns:a16="http://schemas.microsoft.com/office/drawing/2014/main" id="{601C58CF-E952-40FC-A470-273DA7162778}"/>
               </a:ext>
             </a:extLst>
           </p:cNvPr>
@@ -1652,7 +1652,7 @@
           <p:cNvPr id="10" name="">
             <a:extLst xmlns:a="http://schemas.openxmlformats.org/drawingml/2006/main">
               <a:ext uri="{FF2B5EF4-FFF2-40B4-BE49-F238E27FC236}">
-                <a16:creationId xmlns:a16="http://schemas.microsoft.com/office/drawing/2014/main" id="{B8723D1C-6FEE-4D59-880B-76CB1E672AA9}"/>
+                <a16:creationId xmlns:a16="http://schemas.microsoft.com/office/drawing/2014/main" id="{2C55CA8D-3CC6-4B34-895B-AA10D7F21BB0}"/>
               </a:ext>
             </a:extLst>
           </p:cNvPr>
@@ -1706,7 +1706,7 @@
     </p:spTree>
     <p:extLst>
       <p:ext uri="{BB962C8B-B14F-4D97-AF65-F5344CB8AC3E}">
-        <p14:creationId xmlns:p14="http://schemas.microsoft.com/office/powerpoint/2010/main" val="801675706"/>
+        <p14:creationId xmlns:p14="http://schemas.microsoft.com/office/powerpoint/2010/main" val="88473468"/>
       </p:ext>
     </p:extLst>
   </p:cSld>
@@ -1741,7 +1741,7 @@
           <p:nvPr/>
         </p:nvPicPr>
         <p:blipFill>
-          <a:blip xmlns:r="http://schemas.openxmlformats.org/officeDocument/2006/relationships" xmlns:a="http://schemas.openxmlformats.org/drawingml/2006/main" r:embed="Rf32b217d445b4998"/>
+          <a:blip xmlns:r="http://schemas.openxmlformats.org/officeDocument/2006/relationships" xmlns:a="http://schemas.openxmlformats.org/drawingml/2006/main" r:embed="Re9b16e91ce9947ce"/>
           <a:stretch xmlns:a="http://schemas.openxmlformats.org/drawingml/2006/main"/>
         </p:blipFill>
         <p:spPr>
@@ -2245,7 +2245,7 @@
         <p:spPr>
           <a:xfrm xmlns:a="http://schemas.openxmlformats.org/drawingml/2006/main">
             <a:off x="1009650" y="1790700"/>
-            <a:ext cx="4095750" cy="228600"/>
+            <a:ext cx="6191250" cy="228600"/>
           </a:xfrm>
           <a:prstGeom xmlns:a="http://schemas.openxmlformats.org/drawingml/2006/main" prst="rect">
             <a:avLst/>
@@ -2280,7 +2280,7 @@
                 <a:ea typeface="PingFang SC"/>
                 <a:cs typeface="PingFang SC"/>
               </a:rPr>
-              <a:t>推荐/搜索成为核心交互，需要补齐两类路线的短板</a:t>
+              <a:t>教育推荐/搜索需求占比持续上升，现有路线难以兼顾时效性与可解释性</a:t>
             </a:r>
           </a:p>
         </p:txBody>
@@ -2301,8 +2301,8 @@
         </p:nvSpPr>
         <p:spPr>
           <a:xfrm xmlns:a="http://schemas.openxmlformats.org/drawingml/2006/main">
-            <a:off x="800100" y="2266950"/>
-            <a:ext cx="4953000" cy="228600"/>
+            <a:off x="800100" y="2247900"/>
+            <a:ext cx="6572250" cy="400050"/>
           </a:xfrm>
           <a:prstGeom xmlns:a="http://schemas.openxmlformats.org/drawingml/2006/main" prst="rect">
             <a:avLst/>
@@ -2337,7 +2337,31 @@
                 <a:ea typeface="PingFang SC"/>
                 <a:cs typeface="PingFang SC"/>
               </a:rPr>
-              <a:t>现有两条技术路线各有优势，但都难以同时满足业务要求：</a:t>
+              <a:t>核心矛盾：Agent 解释强但慢，判别式推荐快但黑盒</a:t>
+            </a:r>
+          </a:p>
+          <a:p xmlns:a="http://schemas.openxmlformats.org/drawingml/2006/main">
+            <a:pPr>
+              <a:buNone/>
+              <a:defRPr sz="1500" b="1">
+                <a:solidFill>
+                  <a:srgbClr val="344054"/>
+                </a:solidFill>
+                <a:latin typeface="PingFang SC"/>
+                <a:ea typeface="PingFang SC"/>
+                <a:cs typeface="PingFang SC"/>
+              </a:defRPr>
+            </a:pPr>
+            <a:r>
+              <a:rPr sz="1500" b="1">
+                <a:solidFill>
+                  <a:srgbClr val="344054"/>
+                </a:solidFill>
+                <a:latin typeface="PingFang SC"/>
+                <a:ea typeface="PingFang SC"/>
+                <a:cs typeface="PingFang SC"/>
+              </a:rPr>
+              <a:t>需要第三条路线补齐“时效性 + 可解释性”双目标。</a:t>
             </a:r>
           </a:p>
         </p:txBody>
@@ -2358,8 +2382,8 @@
         </p:nvSpPr>
         <p:spPr>
           <a:xfrm xmlns:a="http://schemas.openxmlformats.org/drawingml/2006/main">
-            <a:off x="800100" y="2686050"/>
-            <a:ext cx="3048000" cy="1219200"/>
+            <a:off x="800100" y="2800350"/>
+            <a:ext cx="3105150" cy="1352550"/>
           </a:xfrm>
           <a:prstGeom xmlns:a="http://schemas.openxmlformats.org/drawingml/2006/main" prst="roundRect">
             <a:avLst>
@@ -2367,11 +2391,11 @@
             </a:avLst>
           </a:prstGeom>
           <a:solidFill xmlns:a="http://schemas.openxmlformats.org/drawingml/2006/main">
-            <a:srgbClr val="F4F1FF"/>
+            <a:srgbClr val="F7F5FF"/>
           </a:solidFill>
-          <a:ln xmlns:a="http://schemas.openxmlformats.org/drawingml/2006/main" w="11430">
+          <a:ln xmlns:a="http://schemas.openxmlformats.org/drawingml/2006/main" w="12383">
             <a:solidFill>
-              <a:srgbClr val="C8C2FF"/>
+              <a:srgbClr val="C8C1FF"/>
             </a:solidFill>
             <a:prstDash val="solid"/>
           </a:ln>
@@ -2399,8 +2423,8 @@
         </p:nvSpPr>
         <p:spPr>
           <a:xfrm xmlns:a="http://schemas.openxmlformats.org/drawingml/2006/main">
-            <a:off x="1066800" y="2933700"/>
-            <a:ext cx="2476500" cy="228600"/>
+            <a:off x="1066800" y="3028950"/>
+            <a:ext cx="2571750" cy="228600"/>
           </a:xfrm>
           <a:prstGeom xmlns:a="http://schemas.openxmlformats.org/drawingml/2006/main" prst="rect">
             <a:avLst/>
@@ -2456,8 +2480,8 @@
         </p:nvSpPr>
         <p:spPr>
           <a:xfrm xmlns:a="http://schemas.openxmlformats.org/drawingml/2006/main">
-            <a:off x="1066800" y="3314700"/>
-            <a:ext cx="2476500" cy="400050"/>
+            <a:off x="1066800" y="3352800"/>
+            <a:ext cx="2571750" cy="609600"/>
           </a:xfrm>
           <a:prstGeom xmlns:a="http://schemas.openxmlformats.org/drawingml/2006/main" prst="rect">
             <a:avLst/>
@@ -2492,7 +2516,7 @@
                 <a:ea typeface="PingFang SC"/>
                 <a:cs typeface="PingFang SC"/>
               </a:rPr>
-              <a:t>• 决策显式，可解释性强</a:t>
+              <a:t>• 中间决策显式，可解释性强</a:t>
             </a:r>
           </a:p>
           <a:p xmlns:a="http://schemas.openxmlformats.org/drawingml/2006/main">
@@ -2516,7 +2540,31 @@
                 <a:ea typeface="PingFang SC"/>
                 <a:cs typeface="PingFang SC"/>
               </a:rPr>
-              <a:t>• 多轮调用，秒级/十秒级时延</a:t>
+              <a:t>• 多轮模型调用与串行工具链</a:t>
+            </a:r>
+          </a:p>
+          <a:p xmlns:a="http://schemas.openxmlformats.org/drawingml/2006/main">
+            <a:pPr>
+              <a:buNone/>
+              <a:defRPr sz="1050" b="0">
+                <a:solidFill>
+                  <a:srgbClr val="344054"/>
+                </a:solidFill>
+                <a:latin typeface="PingFang SC"/>
+                <a:ea typeface="PingFang SC"/>
+                <a:cs typeface="PingFang SC"/>
+              </a:defRPr>
+            </a:pPr>
+            <a:r>
+              <a:rPr sz="1050" b="0">
+                <a:solidFill>
+                  <a:srgbClr val="344054"/>
+                </a:solidFill>
+                <a:latin typeface="PingFang SC"/>
+                <a:ea typeface="PingFang SC"/>
+                <a:cs typeface="PingFang SC"/>
+              </a:rPr>
+              <a:t>• 秒级/十秒级时延，成本随复杂度增长</a:t>
             </a:r>
           </a:p>
         </p:txBody>
@@ -2537,8 +2585,8 @@
         </p:nvSpPr>
         <p:spPr>
           <a:xfrm xmlns:a="http://schemas.openxmlformats.org/drawingml/2006/main">
-            <a:off x="4095750" y="2686050"/>
-            <a:ext cx="3048000" cy="1219200"/>
+            <a:off x="4038600" y="2800350"/>
+            <a:ext cx="3105150" cy="1352550"/>
           </a:xfrm>
           <a:prstGeom xmlns:a="http://schemas.openxmlformats.org/drawingml/2006/main" prst="roundRect">
             <a:avLst>
@@ -2546,11 +2594,11 @@
             </a:avLst>
           </a:prstGeom>
           <a:solidFill xmlns:a="http://schemas.openxmlformats.org/drawingml/2006/main">
-            <a:srgbClr val="F4F1FF"/>
+            <a:srgbClr val="F7F5FF"/>
           </a:solidFill>
-          <a:ln xmlns:a="http://schemas.openxmlformats.org/drawingml/2006/main" w="11430">
+          <a:ln xmlns:a="http://schemas.openxmlformats.org/drawingml/2006/main" w="12383">
             <a:solidFill>
-              <a:srgbClr val="C8C2FF"/>
+              <a:srgbClr val="C8C1FF"/>
             </a:solidFill>
             <a:prstDash val="solid"/>
           </a:ln>
@@ -2578,8 +2626,8 @@
         </p:nvSpPr>
         <p:spPr>
           <a:xfrm xmlns:a="http://schemas.openxmlformats.org/drawingml/2006/main">
-            <a:off x="4362450" y="2933700"/>
-            <a:ext cx="2476500" cy="228600"/>
+            <a:off x="4305300" y="3028950"/>
+            <a:ext cx="2571750" cy="228600"/>
           </a:xfrm>
           <a:prstGeom xmlns:a="http://schemas.openxmlformats.org/drawingml/2006/main" prst="rect">
             <a:avLst/>
@@ -2635,8 +2683,8 @@
         </p:nvSpPr>
         <p:spPr>
           <a:xfrm xmlns:a="http://schemas.openxmlformats.org/drawingml/2006/main">
-            <a:off x="4362450" y="3314700"/>
-            <a:ext cx="2476500" cy="400050"/>
+            <a:off x="4305300" y="3352800"/>
+            <a:ext cx="2571750" cy="609600"/>
           </a:xfrm>
           <a:prstGeom xmlns:a="http://schemas.openxmlformats.org/drawingml/2006/main" prst="rect">
             <a:avLst/>
@@ -2671,7 +2719,7 @@
                 <a:ea typeface="PingFang SC"/>
                 <a:cs typeface="PingFang SC"/>
               </a:rPr>
-              <a:t>• 数十毫秒响应，时效性优秀</a:t>
+              <a:t>• 毫秒级响应，适合高频交互</a:t>
             </a:r>
           </a:p>
           <a:p xmlns:a="http://schemas.openxmlformats.org/drawingml/2006/main">
@@ -2695,7 +2743,31 @@
                 <a:ea typeface="PingFang SC"/>
                 <a:cs typeface="PingFang SC"/>
               </a:rPr>
-              <a:t>• 黑盒打分，缺少可审查解释</a:t>
+              <a:t>• 偏好隐含在参数与 embedding 中</a:t>
+            </a:r>
+          </a:p>
+          <a:p xmlns:a="http://schemas.openxmlformats.org/drawingml/2006/main">
+            <a:pPr>
+              <a:buNone/>
+              <a:defRPr sz="1050" b="0">
+                <a:solidFill>
+                  <a:srgbClr val="344054"/>
+                </a:solidFill>
+                <a:latin typeface="PingFang SC"/>
+                <a:ea typeface="PingFang SC"/>
+                <a:cs typeface="PingFang SC"/>
+              </a:defRPr>
+            </a:pPr>
+            <a:r>
+              <a:rPr sz="1050" b="0">
+                <a:solidFill>
+                  <a:srgbClr val="344054"/>
+                </a:solidFill>
+                <a:latin typeface="PingFang SC"/>
+                <a:ea typeface="PingFang SC"/>
+                <a:cs typeface="PingFang SC"/>
+              </a:rPr>
+              <a:t>• 难输出可审查的推荐依据</a:t>
             </a:r>
           </a:p>
         </p:txBody>
@@ -2716,8 +2788,8 @@
         </p:nvSpPr>
         <p:spPr>
           <a:xfrm xmlns:a="http://schemas.openxmlformats.org/drawingml/2006/main">
-            <a:off x="3600450" y="3943350"/>
-            <a:ext cx="704850" cy="552450"/>
+            <a:off x="3619500" y="4133850"/>
+            <a:ext cx="704850" cy="457200"/>
           </a:xfrm>
           <a:prstGeom xmlns:a="http://schemas.openxmlformats.org/drawingml/2006/main" prst="rect">
             <a:avLst/>
@@ -2773,8 +2845,8 @@
         </p:nvSpPr>
         <p:spPr>
           <a:xfrm xmlns:a="http://schemas.openxmlformats.org/drawingml/2006/main">
-            <a:off x="1390650" y="4762500"/>
-            <a:ext cx="5753100" cy="1104900"/>
+            <a:off x="800100" y="4724400"/>
+            <a:ext cx="6343650" cy="1200150"/>
           </a:xfrm>
           <a:prstGeom xmlns:a="http://schemas.openxmlformats.org/drawingml/2006/main" prst="roundRect">
             <a:avLst>
@@ -2782,12 +2854,187 @@
             </a:avLst>
           </a:prstGeom>
           <a:solidFill xmlns:a="http://schemas.openxmlformats.org/drawingml/2006/main">
-            <a:srgbClr val="635BFF"/>
+            <a:srgbClr val="F0EDFF"/>
           </a:solidFill>
-          <a:ln xmlns:a="http://schemas.openxmlformats.org/drawingml/2006/main" w="0">
+          <a:ln xmlns:a="http://schemas.openxmlformats.org/drawingml/2006/main" w="14288">
             <a:solidFill>
               <a:srgbClr val="635BFF"/>
             </a:solidFill>
+            <a:prstDash val="solid"/>
+          </a:ln>
+        </p:spPr>
+        <p:style>
+          <a:lnRef xmlns:a="http://schemas.openxmlformats.org/drawingml/2006/main" idx="0"/>
+          <a:fillRef xmlns:a="http://schemas.openxmlformats.org/drawingml/2006/main" idx="0"/>
+          <a:effectRef xmlns:a="http://schemas.openxmlformats.org/drawingml/2006/main" idx="6"/>
+          <a:fontRef xmlns:a="http://schemas.openxmlformats.org/drawingml/2006/main" idx="major"/>
+        </p:style>
+      </p:sp>
+      <p:sp>
+        <p:nvSpPr>
+          <p:cNvPr id="22" name="">
+            <a:extLst xmlns:a="http://schemas.openxmlformats.org/drawingml/2006/main">
+              <a:ext uri="{FF2B5EF4-FFF2-40B4-BE49-F238E27FC236}">
+                <a16:creationId xmlns:a16="http://schemas.microsoft.com/office/drawing/2014/main" id="{5071D9F1-E7FF-416E-85FF-799D13DFECCF}"/>
+              </a:ext>
+            </a:extLst>
+          </p:cNvPr>
+          <p:cNvSpPr>
+            <a:spLocks xmlns:a="http://schemas.openxmlformats.org/drawingml/2006/main" noGrp="1"/>
+          </p:cNvSpPr>
+          <p:nvPr/>
+        </p:nvSpPr>
+        <p:spPr>
+          <a:xfrm xmlns:a="http://schemas.openxmlformats.org/drawingml/2006/main">
+            <a:off x="1181100" y="4914900"/>
+            <a:ext cx="5619750" cy="247650"/>
+          </a:xfrm>
+          <a:prstGeom xmlns:a="http://schemas.openxmlformats.org/drawingml/2006/main" prst="rect">
+            <a:avLst/>
+          </a:prstGeom>
+          <a:noFill xmlns:a="http://schemas.openxmlformats.org/drawingml/2006/main"/>
+          <a:ln xmlns:a="http://schemas.openxmlformats.org/drawingml/2006/main" w="0">
+            <a:noFill/>
+            <a:prstDash val="solid"/>
+          </a:ln>
+        </p:spPr>
+        <p:txBody>
+          <a:bodyPr xmlns:a="http://schemas.openxmlformats.org/drawingml/2006/main" wrap="square" lIns="0" tIns="0" rIns="0" bIns="0"/>
+          <a:lstStyle xmlns:a="http://schemas.openxmlformats.org/drawingml/2006/main"/>
+          <a:p xmlns:a="http://schemas.openxmlformats.org/drawingml/2006/main">
+            <a:pPr>
+              <a:buNone/>
+              <a:defRPr sz="1650" b="1">
+                <a:solidFill>
+                  <a:srgbClr val="332A86"/>
+                </a:solidFill>
+                <a:latin typeface="PingFang SC"/>
+                <a:ea typeface="PingFang SC"/>
+                <a:cs typeface="PingFang SC"/>
+              </a:defRPr>
+            </a:pPr>
+            <a:r>
+              <a:rPr sz="1650" b="1">
+                <a:solidFill>
+                  <a:srgbClr val="332A86"/>
+                </a:solidFill>
+                <a:latin typeface="PingFang SC"/>
+                <a:ea typeface="PingFang SC"/>
+                <a:cs typeface="PingFang SC"/>
+              </a:rPr>
+              <a:t>第三条路线：OneRec 生成式推荐</a:t>
+            </a:r>
+          </a:p>
+        </p:txBody>
+      </p:sp>
+      <p:sp>
+        <p:nvSpPr>
+          <p:cNvPr id="23" name="">
+            <a:extLst xmlns:a="http://schemas.openxmlformats.org/drawingml/2006/main">
+              <a:ext uri="{FF2B5EF4-FFF2-40B4-BE49-F238E27FC236}">
+                <a16:creationId xmlns:a16="http://schemas.microsoft.com/office/drawing/2014/main" id="{62ECFFFF-E66C-4663-A140-378610EE0038}"/>
+              </a:ext>
+            </a:extLst>
+          </p:cNvPr>
+          <p:cNvSpPr>
+            <a:spLocks xmlns:a="http://schemas.openxmlformats.org/drawingml/2006/main" noGrp="1"/>
+          </p:cNvSpPr>
+          <p:nvPr/>
+        </p:nvSpPr>
+        <p:spPr>
+          <a:xfrm xmlns:a="http://schemas.openxmlformats.org/drawingml/2006/main">
+            <a:off x="1181100" y="5257800"/>
+            <a:ext cx="5562600" cy="514350"/>
+          </a:xfrm>
+          <a:prstGeom xmlns:a="http://schemas.openxmlformats.org/drawingml/2006/main" prst="rect">
+            <a:avLst/>
+          </a:prstGeom>
+          <a:noFill xmlns:a="http://schemas.openxmlformats.org/drawingml/2006/main"/>
+          <a:ln xmlns:a="http://schemas.openxmlformats.org/drawingml/2006/main" w="0">
+            <a:noFill/>
+            <a:prstDash val="solid"/>
+          </a:ln>
+        </p:spPr>
+        <p:txBody>
+          <a:bodyPr xmlns:a="http://schemas.openxmlformats.org/drawingml/2006/main" wrap="square" lIns="0" tIns="0" rIns="0" bIns="0"/>
+          <a:lstStyle xmlns:a="http://schemas.openxmlformats.org/drawingml/2006/main"/>
+          <a:p xmlns:a="http://schemas.openxmlformats.org/drawingml/2006/main">
+            <a:pPr>
+              <a:buNone/>
+              <a:defRPr sz="1125" b="0">
+                <a:solidFill>
+                  <a:srgbClr val="2F3556"/>
+                </a:solidFill>
+                <a:latin typeface="PingFang SC"/>
+                <a:ea typeface="PingFang SC"/>
+                <a:cs typeface="PingFang SC"/>
+              </a:defRPr>
+            </a:pPr>
+            <a:r>
+              <a:rPr sz="1125" b="0">
+                <a:solidFill>
+                  <a:srgbClr val="2F3556"/>
+                </a:solidFill>
+                <a:latin typeface="PingFang SC"/>
+                <a:ea typeface="PingFang SC"/>
+                <a:cs typeface="PingFang SC"/>
+              </a:rPr>
+              <a:t>在在线时延约束下保留推荐解释：借鉴 OneRec-Think / OneReason 的显式推理与快慢思考架构，</a:t>
+            </a:r>
+          </a:p>
+          <a:p xmlns:a="http://schemas.openxmlformats.org/drawingml/2006/main">
+            <a:pPr>
+              <a:buNone/>
+              <a:defRPr sz="1125" b="0">
+                <a:solidFill>
+                  <a:srgbClr val="2F3556"/>
+                </a:solidFill>
+                <a:latin typeface="PingFang SC"/>
+                <a:ea typeface="PingFang SC"/>
+                <a:cs typeface="PingFang SC"/>
+              </a:defRPr>
+            </a:pPr>
+            <a:r>
+              <a:rPr sz="1125" b="0">
+                <a:solidFill>
+                  <a:srgbClr val="2F3556"/>
+                </a:solidFill>
+                <a:latin typeface="PingFang SC"/>
+                <a:ea typeface="PingFang SC"/>
+                <a:cs typeface="PingFang SC"/>
+              </a:rPr>
+              <a:t>将对话、推理、推荐统一到单一模型，同时服务精度、可解释性与工程落地。</a:t>
+            </a:r>
+          </a:p>
+        </p:txBody>
+      </p:sp>
+      <p:sp>
+        <p:nvSpPr>
+          <p:cNvPr id="24" name="">
+            <a:extLst xmlns:a="http://schemas.openxmlformats.org/drawingml/2006/main">
+              <a:ext uri="{FF2B5EF4-FFF2-40B4-BE49-F238E27FC236}">
+                <a16:creationId xmlns:a16="http://schemas.microsoft.com/office/drawing/2014/main" id="{11B62741-F682-41FC-A5FA-D19E99FD4BAC}"/>
+              </a:ext>
+            </a:extLst>
+          </p:cNvPr>
+          <p:cNvSpPr>
+            <a:spLocks xmlns:a="http://schemas.openxmlformats.org/drawingml/2006/main" noGrp="1"/>
+          </p:cNvSpPr>
+          <p:nvPr/>
+        </p:nvSpPr>
+        <p:spPr>
+          <a:xfrm xmlns:a="http://schemas.openxmlformats.org/drawingml/2006/main">
+            <a:off x="7791450" y="1866900"/>
+            <a:ext cx="3371850" cy="3657600"/>
+          </a:xfrm>
+          <a:prstGeom xmlns:a="http://schemas.openxmlformats.org/drawingml/2006/main" prst="roundRect">
+            <a:avLst>
+              <a:gd name="adj" fmla="val 2260"/>
+            </a:avLst>
+          </a:prstGeom>
+          <a:noFill xmlns:a="http://schemas.openxmlformats.org/drawingml/2006/main"/>
+          <a:ln xmlns:a="http://schemas.openxmlformats.org/drawingml/2006/main" w="0">
+            <a:noFill/>
             <a:prstDash val="solid"/>
           </a:ln>
         </p:spPr>
@@ -2798,185 +3045,6 @@
           <a:fontRef xmlns:a="http://schemas.openxmlformats.org/drawingml/2006/main" idx="major"/>
         </p:style>
       </p:sp>
-      <p:sp>
-        <p:nvSpPr>
-          <p:cNvPr id="22" name="">
-            <a:extLst xmlns:a="http://schemas.openxmlformats.org/drawingml/2006/main">
-              <a:ext uri="{FF2B5EF4-FFF2-40B4-BE49-F238E27FC236}">
-                <a16:creationId xmlns:a16="http://schemas.microsoft.com/office/drawing/2014/main" id="{5071D9F1-E7FF-416E-85FF-799D13DFECCF}"/>
-              </a:ext>
-            </a:extLst>
-          </p:cNvPr>
-          <p:cNvSpPr>
-            <a:spLocks xmlns:a="http://schemas.openxmlformats.org/drawingml/2006/main" noGrp="1"/>
-          </p:cNvSpPr>
-          <p:nvPr/>
-        </p:nvSpPr>
-        <p:spPr>
-          <a:xfrm xmlns:a="http://schemas.openxmlformats.org/drawingml/2006/main">
-            <a:off x="1752600" y="5010150"/>
-            <a:ext cx="4953000" cy="247650"/>
-          </a:xfrm>
-          <a:prstGeom xmlns:a="http://schemas.openxmlformats.org/drawingml/2006/main" prst="rect">
-            <a:avLst/>
-          </a:prstGeom>
-          <a:noFill xmlns:a="http://schemas.openxmlformats.org/drawingml/2006/main"/>
-          <a:ln xmlns:a="http://schemas.openxmlformats.org/drawingml/2006/main" w="0">
-            <a:noFill/>
-            <a:prstDash val="solid"/>
-          </a:ln>
-        </p:spPr>
-        <p:txBody>
-          <a:bodyPr xmlns:a="http://schemas.openxmlformats.org/drawingml/2006/main" wrap="square" lIns="0" tIns="0" rIns="0" bIns="0"/>
-          <a:lstStyle xmlns:a="http://schemas.openxmlformats.org/drawingml/2006/main"/>
-          <a:p xmlns:a="http://schemas.openxmlformats.org/drawingml/2006/main">
-            <a:pPr>
-              <a:buNone/>
-              <a:defRPr sz="1650" b="1">
-                <a:solidFill>
-                  <a:srgbClr val="FFFFFF"/>
-                </a:solidFill>
-                <a:latin typeface="PingFang SC"/>
-                <a:ea typeface="PingFang SC"/>
-                <a:cs typeface="PingFang SC"/>
-              </a:defRPr>
-            </a:pPr>
-            <a:r>
-              <a:rPr sz="1650" b="1">
-                <a:solidFill>
-                  <a:srgbClr val="FFFFFF"/>
-                </a:solidFill>
-                <a:latin typeface="PingFang SC"/>
-                <a:ea typeface="PingFang SC"/>
-                <a:cs typeface="PingFang SC"/>
-              </a:rPr>
-              <a:t>第三条路线：OneRec 生成式推荐</a:t>
-            </a:r>
-          </a:p>
-        </p:txBody>
-      </p:sp>
-      <p:sp>
-        <p:nvSpPr>
-          <p:cNvPr id="23" name="">
-            <a:extLst xmlns:a="http://schemas.openxmlformats.org/drawingml/2006/main">
-              <a:ext uri="{FF2B5EF4-FFF2-40B4-BE49-F238E27FC236}">
-                <a16:creationId xmlns:a16="http://schemas.microsoft.com/office/drawing/2014/main" id="{62ECFFFF-E66C-4663-A140-378610EE0038}"/>
-              </a:ext>
-            </a:extLst>
-          </p:cNvPr>
-          <p:cNvSpPr>
-            <a:spLocks xmlns:a="http://schemas.openxmlformats.org/drawingml/2006/main" noGrp="1"/>
-          </p:cNvSpPr>
-          <p:nvPr/>
-        </p:nvSpPr>
-        <p:spPr>
-          <a:xfrm xmlns:a="http://schemas.openxmlformats.org/drawingml/2006/main">
-            <a:off x="1752600" y="5353050"/>
-            <a:ext cx="4953000" cy="381000"/>
-          </a:xfrm>
-          <a:prstGeom xmlns:a="http://schemas.openxmlformats.org/drawingml/2006/main" prst="rect">
-            <a:avLst/>
-          </a:prstGeom>
-          <a:noFill xmlns:a="http://schemas.openxmlformats.org/drawingml/2006/main"/>
-          <a:ln xmlns:a="http://schemas.openxmlformats.org/drawingml/2006/main" w="0">
-            <a:noFill/>
-            <a:prstDash val="solid"/>
-          </a:ln>
-        </p:spPr>
-        <p:txBody>
-          <a:bodyPr xmlns:a="http://schemas.openxmlformats.org/drawingml/2006/main" wrap="square" lIns="0" tIns="0" rIns="0" bIns="0"/>
-          <a:lstStyle xmlns:a="http://schemas.openxmlformats.org/drawingml/2006/main"/>
-          <a:p xmlns:a="http://schemas.openxmlformats.org/drawingml/2006/main">
-            <a:pPr>
-              <a:buNone/>
-              <a:defRPr sz="1050" b="0">
-                <a:solidFill>
-                  <a:srgbClr val="EEF2FF"/>
-                </a:solidFill>
-                <a:latin typeface="PingFang SC"/>
-                <a:ea typeface="PingFang SC"/>
-                <a:cs typeface="PingFang SC"/>
-              </a:defRPr>
-            </a:pPr>
-            <a:r>
-              <a:rPr sz="1050" b="0">
-                <a:solidFill>
-                  <a:srgbClr val="EEF2FF"/>
-                </a:solidFill>
-                <a:latin typeface="PingFang SC"/>
-                <a:ea typeface="PingFang SC"/>
-                <a:cs typeface="PingFang SC"/>
-              </a:rPr>
-              <a:t>在线时延约束下，提供具备一定忠实性的推荐解释</a:t>
-            </a:r>
-          </a:p>
-          <a:p xmlns:a="http://schemas.openxmlformats.org/drawingml/2006/main">
-            <a:pPr>
-              <a:buNone/>
-              <a:defRPr sz="1050" b="0">
-                <a:solidFill>
-                  <a:srgbClr val="EEF2FF"/>
-                </a:solidFill>
-                <a:latin typeface="PingFang SC"/>
-                <a:ea typeface="PingFang SC"/>
-                <a:cs typeface="PingFang SC"/>
-              </a:defRPr>
-            </a:pPr>
-            <a:r>
-              <a:rPr sz="1050" b="0">
-                <a:solidFill>
-                  <a:srgbClr val="EEF2FF"/>
-                </a:solidFill>
-                <a:latin typeface="PingFang SC"/>
-                <a:ea typeface="PingFang SC"/>
-                <a:cs typeface="PingFang SC"/>
-              </a:rPr>
-              <a:t>参照 OneRec-Think / OneReason，将推理与推荐统一到单一模型</a:t>
-            </a:r>
-          </a:p>
-        </p:txBody>
-      </p:sp>
-      <p:sp>
-        <p:nvSpPr>
-          <p:cNvPr id="24" name="">
-            <a:extLst xmlns:a="http://schemas.openxmlformats.org/drawingml/2006/main">
-              <a:ext uri="{FF2B5EF4-FFF2-40B4-BE49-F238E27FC236}">
-                <a16:creationId xmlns:a16="http://schemas.microsoft.com/office/drawing/2014/main" id="{11B62741-F682-41FC-A5FA-D19E99FD4BAC}"/>
-              </a:ext>
-            </a:extLst>
-          </p:cNvPr>
-          <p:cNvSpPr>
-            <a:spLocks xmlns:a="http://schemas.openxmlformats.org/drawingml/2006/main" noGrp="1"/>
-          </p:cNvSpPr>
-          <p:nvPr/>
-        </p:nvSpPr>
-        <p:spPr>
-          <a:xfrm xmlns:a="http://schemas.openxmlformats.org/drawingml/2006/main">
-            <a:off x="7791450" y="1866900"/>
-            <a:ext cx="3371850" cy="3657600"/>
-          </a:xfrm>
-          <a:prstGeom xmlns:a="http://schemas.openxmlformats.org/drawingml/2006/main" prst="roundRect">
-            <a:avLst>
-              <a:gd name="adj" fmla="val 2260"/>
-            </a:avLst>
-          </a:prstGeom>
-          <a:solidFill xmlns:a="http://schemas.openxmlformats.org/drawingml/2006/main">
-            <a:srgbClr val="FFFFFF"/>
-          </a:solidFill>
-          <a:ln xmlns:a="http://schemas.openxmlformats.org/drawingml/2006/main" w="10478">
-            <a:solidFill>
-              <a:srgbClr val="C7E7FF"/>
-            </a:solidFill>
-            <a:prstDash val="solid"/>
-          </a:ln>
-        </p:spPr>
-        <p:style>
-          <a:lnRef xmlns:a="http://schemas.openxmlformats.org/drawingml/2006/main" idx="0"/>
-          <a:fillRef xmlns:a="http://schemas.openxmlformats.org/drawingml/2006/main" idx="0"/>
-          <a:effectRef xmlns:a="http://schemas.openxmlformats.org/drawingml/2006/main" idx="4"/>
-          <a:fontRef xmlns:a="http://schemas.openxmlformats.org/drawingml/2006/main" idx="major"/>
-        </p:style>
-      </p:sp>
       <p:pic>
         <p:nvPicPr>
           <p:cNvPr id="53" name=""/>
@@ -2986,13 +3054,13 @@
           <p:nvPr/>
         </p:nvPicPr>
         <p:blipFill>
-          <a:blip xmlns:r="http://schemas.openxmlformats.org/officeDocument/2006/relationships" xmlns:a="http://schemas.openxmlformats.org/drawingml/2006/main" r:embed="R3749019976a8475c"/>
+          <a:blip xmlns:r="http://schemas.openxmlformats.org/officeDocument/2006/relationships" xmlns:a="http://schemas.openxmlformats.org/drawingml/2006/main" r:embed="R8a0b731f171c4ffa"/>
           <a:stretch xmlns:a="http://schemas.openxmlformats.org/drawingml/2006/main"/>
         </p:blipFill>
         <p:spPr>
           <a:xfrm xmlns:a="http://schemas.openxmlformats.org/drawingml/2006/main">
-            <a:off x="8020050" y="2511010"/>
-            <a:ext cx="2914650" cy="2026479"/>
+            <a:off x="7543800" y="2038350"/>
+            <a:ext cx="3762375" cy="2619375"/>
           </a:xfrm>
           <a:prstGeom xmlns:a="http://schemas.openxmlformats.org/drawingml/2006/main" prst="rect">
             <a:avLst/>
@@ -3015,8 +3083,8 @@
         </p:nvSpPr>
         <p:spPr>
           <a:xfrm xmlns:a="http://schemas.openxmlformats.org/drawingml/2006/main">
-            <a:off x="8115300" y="5010150"/>
-            <a:ext cx="2724150" cy="228600"/>
+            <a:off x="7543800" y="4933950"/>
+            <a:ext cx="3762375" cy="438150"/>
           </a:xfrm>
           <a:prstGeom xmlns:a="http://schemas.openxmlformats.org/drawingml/2006/main" prst="rect">
             <a:avLst/>
@@ -3051,7 +3119,31 @@
                 <a:ea typeface="PingFang SC"/>
                 <a:cs typeface="PingFang SC"/>
               </a:rPr>
-              <a:t>OneRec 参照：显式推理、时延优化、评估闭环</a:t>
+              <a:t>OneRec</a:t>
+            </a:r>
+          </a:p>
+          <a:p xmlns:a="http://schemas.openxmlformats.org/drawingml/2006/main">
+            <a:pPr algn="ctr">
+              <a:buNone/>
+              <a:defRPr sz="1125" b="1">
+                <a:solidFill>
+                  <a:srgbClr val="14113D"/>
+                </a:solidFill>
+                <a:latin typeface="PingFang SC"/>
+                <a:ea typeface="PingFang SC"/>
+                <a:cs typeface="PingFang SC"/>
+              </a:defRPr>
+            </a:pPr>
+            <a:r>
+              <a:rPr sz="1125" b="1">
+                <a:solidFill>
+                  <a:srgbClr val="14113D"/>
+                </a:solidFill>
+                <a:latin typeface="PingFang SC"/>
+                <a:ea typeface="PingFang SC"/>
+                <a:cs typeface="PingFang SC"/>
+              </a:rPr>
+              <a:t>参照：显式推理、时延优化、评估闭环</a:t>
             </a:r>
           </a:p>
         </p:txBody>
@@ -3087,14 +3179,14 @@
       </p:grpSpPr>
       <p:pic>
         <p:nvPicPr>
-          <p:cNvPr id="38" name=""/>
+          <p:cNvPr id="39" name=""/>
           <p:cNvPicPr>
             <a:picLocks xmlns:a="http://schemas.openxmlformats.org/drawingml/2006/main" noChangeAspect="1"/>
           </p:cNvPicPr>
           <p:nvPr/>
         </p:nvPicPr>
         <p:blipFill>
-          <a:blip xmlns:r="http://schemas.openxmlformats.org/officeDocument/2006/relationships" xmlns:a="http://schemas.openxmlformats.org/drawingml/2006/main" r:embed="R7d186bf0ae9a448a"/>
+          <a:blip xmlns:r="http://schemas.openxmlformats.org/officeDocument/2006/relationships" xmlns:a="http://schemas.openxmlformats.org/drawingml/2006/main" r:embed="R8d07f21d2e26420e"/>
           <a:stretch xmlns:a="http://schemas.openxmlformats.org/drawingml/2006/main"/>
         </p:blipFill>
         <p:spPr>
@@ -3509,8 +3601,8 @@
         </p:nvSpPr>
         <p:spPr>
           <a:xfrm xmlns:a="http://schemas.openxmlformats.org/drawingml/2006/main">
-            <a:off x="800100" y="1428750"/>
-            <a:ext cx="7810500" cy="323850"/>
+            <a:off x="800100" y="1390650"/>
+            <a:ext cx="8382000" cy="323850"/>
           </a:xfrm>
           <a:prstGeom xmlns:a="http://schemas.openxmlformats.org/drawingml/2006/main" prst="rect">
             <a:avLst/>
@@ -3545,7 +3637,7 @@
                 <a:ea typeface="PingFang SC"/>
                 <a:cs typeface="PingFang SC"/>
               </a:rPr>
-              <a:t>目标：产出教育领域的基座推荐模型</a:t>
+              <a:t>总体目标：产出教育领域的基座推荐模型</a:t>
             </a:r>
           </a:p>
         </p:txBody>
@@ -3566,8 +3658,8 @@
         </p:nvSpPr>
         <p:spPr>
           <a:xfrm xmlns:a="http://schemas.openxmlformats.org/drawingml/2006/main">
-            <a:off x="800100" y="1847850"/>
-            <a:ext cx="9334500" cy="266700"/>
+            <a:off x="800100" y="1809750"/>
+            <a:ext cx="9906000" cy="457200"/>
           </a:xfrm>
           <a:prstGeom xmlns:a="http://schemas.openxmlformats.org/drawingml/2006/main" prst="rect">
             <a:avLst/>
@@ -3586,7 +3678,7 @@
               <a:buNone/>
               <a:defRPr sz="1275" b="0">
                 <a:solidFill>
-                  <a:srgbClr val="344054"/>
+                  <a:srgbClr val="364157"/>
                 </a:solidFill>
                 <a:latin typeface="PingFang SC"/>
                 <a:ea typeface="PingFang SC"/>
@@ -3596,13 +3688,37 @@
             <a:r>
               <a:rPr sz="1275" b="0">
                 <a:solidFill>
-                  <a:srgbClr val="344054"/>
-                </a:solidFill>
-                <a:latin typeface="PingFang SC"/>
-                <a:ea typeface="PingFang SC"/>
-                <a:cs typeface="PingFang SC"/>
-              </a:rPr>
-              <a:t>以通用 LLM 为底座，在不损失通用对话与推理能力的前提下，注入 Item 语义理解与生成式推荐能力。</a:t>
+                  <a:srgbClr val="364157"/>
+                </a:solidFill>
+                <a:latin typeface="PingFang SC"/>
+                <a:ea typeface="PingFang SC"/>
+                <a:cs typeface="PingFang SC"/>
+              </a:rPr>
+              <a:t>以通用 LLM 为底座，在不损失通用对话与推理能力的前提下，注入教育 Item 语义理解与生成式推荐能力；</a:t>
+            </a:r>
+          </a:p>
+          <a:p xmlns:a="http://schemas.openxmlformats.org/drawingml/2006/main">
+            <a:pPr>
+              <a:buNone/>
+              <a:defRPr sz="1275" b="0">
+                <a:solidFill>
+                  <a:srgbClr val="364157"/>
+                </a:solidFill>
+                <a:latin typeface="PingFang SC"/>
+                <a:ea typeface="PingFang SC"/>
+                <a:cs typeface="PingFang SC"/>
+              </a:defRPr>
+            </a:pPr>
+            <a:r>
+              <a:rPr sz="1275" b="0">
+                <a:solidFill>
+                  <a:srgbClr val="364157"/>
+                </a:solidFill>
+                <a:latin typeface="PingFang SC"/>
+                <a:ea typeface="PingFang SC"/>
+                <a:cs typeface="PingFang SC"/>
+              </a:rPr>
+              <a:t>形成“一个模型、多种场景”的统一能力底座，通过指令适配推荐、搜索、题目理解辅助等下游业务。</a:t>
             </a:r>
           </a:p>
         </p:txBody>
@@ -3623,8 +3739,8 @@
         </p:nvSpPr>
         <p:spPr>
           <a:xfrm xmlns:a="http://schemas.openxmlformats.org/drawingml/2006/main">
-            <a:off x="952500" y="2552700"/>
-            <a:ext cx="4762500" cy="933450"/>
+            <a:off x="952500" y="3143250"/>
+            <a:ext cx="4762500" cy="1047750"/>
           </a:xfrm>
           <a:prstGeom xmlns:a="http://schemas.openxmlformats.org/drawingml/2006/main" prst="roundRect">
             <a:avLst>
@@ -3664,7 +3780,7 @@
         </p:nvSpPr>
         <p:spPr>
           <a:xfrm xmlns:a="http://schemas.openxmlformats.org/drawingml/2006/main">
-            <a:off x="962025" y="2562225"/>
+            <a:off x="962025" y="3152775"/>
             <a:ext cx="4743450" cy="38100"/>
           </a:xfrm>
           <a:prstGeom xmlns:a="http://schemas.openxmlformats.org/drawingml/2006/main" prst="rect">
@@ -3695,7 +3811,7 @@
         </p:nvSpPr>
         <p:spPr>
           <a:xfrm xmlns:a="http://schemas.openxmlformats.org/drawingml/2006/main">
-            <a:off x="1162050" y="2762250"/>
+            <a:off x="1162050" y="3371850"/>
             <a:ext cx="419100" cy="419100"/>
           </a:xfrm>
           <a:prstGeom xmlns:a="http://schemas.openxmlformats.org/drawingml/2006/main" prst="ellipse">
@@ -3726,7 +3842,7 @@
         </p:nvSpPr>
         <p:spPr>
           <a:xfrm xmlns:a="http://schemas.openxmlformats.org/drawingml/2006/main">
-            <a:off x="1162050" y="2857500"/>
+            <a:off x="1162050" y="3467100"/>
             <a:ext cx="419100" cy="209550"/>
           </a:xfrm>
           <a:prstGeom xmlns:a="http://schemas.openxmlformats.org/drawingml/2006/main" prst="rect">
@@ -3783,8 +3899,8 @@
         </p:nvSpPr>
         <p:spPr>
           <a:xfrm xmlns:a="http://schemas.openxmlformats.org/drawingml/2006/main">
-            <a:off x="1752600" y="2743200"/>
-            <a:ext cx="3429000" cy="228600"/>
+            <a:off x="1752600" y="3333750"/>
+            <a:ext cx="3619500" cy="228600"/>
           </a:xfrm>
           <a:prstGeom xmlns:a="http://schemas.openxmlformats.org/drawingml/2006/main" prst="rect">
             <a:avLst/>
@@ -3801,7 +3917,7 @@
           <a:p xmlns:a="http://schemas.openxmlformats.org/drawingml/2006/main">
             <a:pPr>
               <a:buNone/>
-              <a:defRPr sz="1575" b="1">
+              <a:defRPr sz="1350" b="1">
                 <a:solidFill>
                   <a:srgbClr val="111827"/>
                 </a:solidFill>
@@ -3811,7 +3927,7 @@
               </a:defRPr>
             </a:pPr>
             <a:r>
-              <a:rPr sz="1575" b="1">
+              <a:rPr sz="1350" b="1">
                 <a:solidFill>
                   <a:srgbClr val="111827"/>
                 </a:solidFill>
@@ -3819,7 +3935,7 @@
                 <a:ea typeface="PingFang SC"/>
                 <a:cs typeface="PingFang SC"/>
               </a:rPr>
-              <a:t>模型侧：能力注入与遗忘控制</a:t>
+              <a:t>模型侧｜能力注入与遗忘控制</a:t>
             </a:r>
           </a:p>
         </p:txBody>
@@ -3840,8 +3956,8 @@
         </p:nvSpPr>
         <p:spPr>
           <a:xfrm xmlns:a="http://schemas.openxmlformats.org/drawingml/2006/main">
-            <a:off x="1752600" y="3067050"/>
-            <a:ext cx="3524250" cy="266700"/>
+            <a:off x="1752600" y="3638550"/>
+            <a:ext cx="3524250" cy="381000"/>
           </a:xfrm>
           <a:prstGeom xmlns:a="http://schemas.openxmlformats.org/drawingml/2006/main" prst="rect">
             <a:avLst/>
@@ -3858,25 +3974,49 @@
           <a:p xmlns:a="http://schemas.openxmlformats.org/drawingml/2006/main">
             <a:pPr>
               <a:buNone/>
-              <a:defRPr sz="1125" b="0">
-                <a:solidFill>
-                  <a:srgbClr val="344054"/>
-                </a:solidFill>
-                <a:latin typeface="PingFang SC"/>
-                <a:ea typeface="PingFang SC"/>
-                <a:cs typeface="PingFang SC"/>
-              </a:defRPr>
-            </a:pPr>
-            <a:r>
-              <a:rPr sz="1125" b="0">
-                <a:solidFill>
-                  <a:srgbClr val="344054"/>
-                </a:solidFill>
-                <a:latin typeface="PingFang SC"/>
-                <a:ea typeface="PingFang SC"/>
-                <a:cs typeface="PingFang SC"/>
-              </a:rPr>
-              <a:t>保持通用能力，并抑制 text &lt;-&gt; SID 跨训练阶段遗忘</a:t>
+              <a:defRPr sz="1050" b="0">
+                <a:solidFill>
+                  <a:srgbClr val="4A5368"/>
+                </a:solidFill>
+                <a:latin typeface="PingFang SC"/>
+                <a:ea typeface="PingFang SC"/>
+                <a:cs typeface="PingFang SC"/>
+              </a:defRPr>
+            </a:pPr>
+            <a:r>
+              <a:rPr sz="1050" b="0">
+                <a:solidFill>
+                  <a:srgbClr val="4A5368"/>
+                </a:solidFill>
+                <a:latin typeface="PingFang SC"/>
+                <a:ea typeface="PingFang SC"/>
+                <a:cs typeface="PingFang SC"/>
+              </a:rPr>
+              <a:t>能力注入不能牺牲通用能力；同时要抑制 text &lt;-&gt; SID</a:t>
+            </a:r>
+          </a:p>
+          <a:p xmlns:a="http://schemas.openxmlformats.org/drawingml/2006/main">
+            <a:pPr>
+              <a:buNone/>
+              <a:defRPr sz="1050" b="0">
+                <a:solidFill>
+                  <a:srgbClr val="4A5368"/>
+                </a:solidFill>
+                <a:latin typeface="PingFang SC"/>
+                <a:ea typeface="PingFang SC"/>
+                <a:cs typeface="PingFang SC"/>
+              </a:defRPr>
+            </a:pPr>
+            <a:r>
+              <a:rPr sz="1050" b="0">
+                <a:solidFill>
+                  <a:srgbClr val="4A5368"/>
+                </a:solidFill>
+                <a:latin typeface="PingFang SC"/>
+                <a:ea typeface="PingFang SC"/>
+                <a:cs typeface="PingFang SC"/>
+              </a:rPr>
+              <a:t>对齐在 CPT -&gt; SFT -&gt; 增量训练中的遗忘。</a:t>
             </a:r>
           </a:p>
         </p:txBody>
@@ -3897,8 +4037,8 @@
         </p:nvSpPr>
         <p:spPr>
           <a:xfrm xmlns:a="http://schemas.openxmlformats.org/drawingml/2006/main">
-            <a:off x="6248400" y="2552700"/>
-            <a:ext cx="4762500" cy="933450"/>
+            <a:off x="6248400" y="3143250"/>
+            <a:ext cx="4762500" cy="1047750"/>
           </a:xfrm>
           <a:prstGeom xmlns:a="http://schemas.openxmlformats.org/drawingml/2006/main" prst="roundRect">
             <a:avLst>
@@ -3938,7 +4078,7 @@
         </p:nvSpPr>
         <p:spPr>
           <a:xfrm xmlns:a="http://schemas.openxmlformats.org/drawingml/2006/main">
-            <a:off x="6257925" y="2562225"/>
+            <a:off x="6257925" y="3152775"/>
             <a:ext cx="4743450" cy="38100"/>
           </a:xfrm>
           <a:prstGeom xmlns:a="http://schemas.openxmlformats.org/drawingml/2006/main" prst="rect">
@@ -3969,7 +4109,7 @@
         </p:nvSpPr>
         <p:spPr>
           <a:xfrm xmlns:a="http://schemas.openxmlformats.org/drawingml/2006/main">
-            <a:off x="6457950" y="2762250"/>
+            <a:off x="6457950" y="3371850"/>
             <a:ext cx="419100" cy="419100"/>
           </a:xfrm>
           <a:prstGeom xmlns:a="http://schemas.openxmlformats.org/drawingml/2006/main" prst="ellipse">
@@ -4000,7 +4140,7 @@
         </p:nvSpPr>
         <p:spPr>
           <a:xfrm xmlns:a="http://schemas.openxmlformats.org/drawingml/2006/main">
-            <a:off x="6457950" y="2857500"/>
+            <a:off x="6457950" y="3467100"/>
             <a:ext cx="419100" cy="209550"/>
           </a:xfrm>
           <a:prstGeom xmlns:a="http://schemas.openxmlformats.org/drawingml/2006/main" prst="rect">
@@ -4057,8 +4197,8 @@
         </p:nvSpPr>
         <p:spPr>
           <a:xfrm xmlns:a="http://schemas.openxmlformats.org/drawingml/2006/main">
-            <a:off x="7048500" y="2743200"/>
-            <a:ext cx="3429000" cy="228600"/>
+            <a:off x="7048500" y="3333750"/>
+            <a:ext cx="3619500" cy="228600"/>
           </a:xfrm>
           <a:prstGeom xmlns:a="http://schemas.openxmlformats.org/drawingml/2006/main" prst="rect">
             <a:avLst/>
@@ -4075,7 +4215,7 @@
           <a:p xmlns:a="http://schemas.openxmlformats.org/drawingml/2006/main">
             <a:pPr>
               <a:buNone/>
-              <a:defRPr sz="1575" b="1">
+              <a:defRPr sz="1350" b="1">
                 <a:solidFill>
                   <a:srgbClr val="111827"/>
                 </a:solidFill>
@@ -4085,7 +4225,7 @@
               </a:defRPr>
             </a:pPr>
             <a:r>
-              <a:rPr sz="1575" b="1">
+              <a:rPr sz="1350" b="1">
                 <a:solidFill>
                   <a:srgbClr val="111827"/>
                 </a:solidFill>
@@ -4093,7 +4233,7 @@
                 <a:ea typeface="PingFang SC"/>
                 <a:cs typeface="PingFang SC"/>
               </a:rPr>
-              <a:t>应用侧：多任务互扰与部署隔离</a:t>
+              <a:t>应用侧｜多任务互扰与部署隔离</a:t>
             </a:r>
           </a:p>
         </p:txBody>
@@ -4114,8 +4254,8 @@
         </p:nvSpPr>
         <p:spPr>
           <a:xfrm xmlns:a="http://schemas.openxmlformats.org/drawingml/2006/main">
-            <a:off x="7048500" y="3067050"/>
-            <a:ext cx="3524250" cy="266700"/>
+            <a:off x="7048500" y="3638550"/>
+            <a:ext cx="3524250" cy="381000"/>
           </a:xfrm>
           <a:prstGeom xmlns:a="http://schemas.openxmlformats.org/drawingml/2006/main" prst="rect">
             <a:avLst/>
@@ -4132,25 +4272,49 @@
           <a:p xmlns:a="http://schemas.openxmlformats.org/drawingml/2006/main">
             <a:pPr>
               <a:buNone/>
-              <a:defRPr sz="1125" b="0">
-                <a:solidFill>
-                  <a:srgbClr val="344054"/>
-                </a:solidFill>
-                <a:latin typeface="PingFang SC"/>
-                <a:ea typeface="PingFang SC"/>
-                <a:cs typeface="PingFang SC"/>
-              </a:defRPr>
-            </a:pPr>
-            <a:r>
-              <a:rPr sz="1125" b="0">
-                <a:solidFill>
-                  <a:srgbClr val="344054"/>
-                </a:solidFill>
-                <a:latin typeface="PingFang SC"/>
-                <a:ea typeface="PingFang SC"/>
-                <a:cs typeface="PingFang SC"/>
-              </a:rPr>
-              <a:t>训练抑制负迁移，推理防止串扰，上线要有回归与兜底</a:t>
+              <a:defRPr sz="1050" b="0">
+                <a:solidFill>
+                  <a:srgbClr val="4A5368"/>
+                </a:solidFill>
+                <a:latin typeface="PingFang SC"/>
+                <a:ea typeface="PingFang SC"/>
+                <a:cs typeface="PingFang SC"/>
+              </a:defRPr>
+            </a:pPr>
+            <a:r>
+              <a:rPr sz="1050" b="0">
+                <a:solidFill>
+                  <a:srgbClr val="4A5368"/>
+                </a:solidFill>
+                <a:latin typeface="PingFang SC"/>
+                <a:ea typeface="PingFang SC"/>
+                <a:cs typeface="PingFang SC"/>
+              </a:rPr>
+              <a:t>单一模型承载异构任务时，要降低训练负迁移，</a:t>
+            </a:r>
+          </a:p>
+          <a:p xmlns:a="http://schemas.openxmlformats.org/drawingml/2006/main">
+            <a:pPr>
+              <a:buNone/>
+              <a:defRPr sz="1050" b="0">
+                <a:solidFill>
+                  <a:srgbClr val="4A5368"/>
+                </a:solidFill>
+                <a:latin typeface="PingFang SC"/>
+                <a:ea typeface="PingFang SC"/>
+                <a:cs typeface="PingFang SC"/>
+              </a:defRPr>
+            </a:pPr>
+            <a:r>
+              <a:rPr sz="1050" b="0">
+                <a:solidFill>
+                  <a:srgbClr val="4A5368"/>
+                </a:solidFill>
+                <a:latin typeface="PingFang SC"/>
+                <a:ea typeface="PingFang SC"/>
+                <a:cs typeface="PingFang SC"/>
+              </a:rPr>
+              <a:t>推理防串扰，上线配套回归、路由与兜底。</a:t>
             </a:r>
           </a:p>
         </p:txBody>
@@ -4171,8 +4335,8 @@
         </p:nvSpPr>
         <p:spPr>
           <a:xfrm xmlns:a="http://schemas.openxmlformats.org/drawingml/2006/main">
-            <a:off x="952500" y="3867150"/>
-            <a:ext cx="4762500" cy="933450"/>
+            <a:off x="952500" y="4419600"/>
+            <a:ext cx="4762500" cy="1047750"/>
           </a:xfrm>
           <a:prstGeom xmlns:a="http://schemas.openxmlformats.org/drawingml/2006/main" prst="roundRect">
             <a:avLst>
@@ -4212,7 +4376,7 @@
         </p:nvSpPr>
         <p:spPr>
           <a:xfrm xmlns:a="http://schemas.openxmlformats.org/drawingml/2006/main">
-            <a:off x="962025" y="3876675"/>
+            <a:off x="962025" y="4429125"/>
             <a:ext cx="4743450" cy="38100"/>
           </a:xfrm>
           <a:prstGeom xmlns:a="http://schemas.openxmlformats.org/drawingml/2006/main" prst="rect">
@@ -4243,7 +4407,7 @@
         </p:nvSpPr>
         <p:spPr>
           <a:xfrm xmlns:a="http://schemas.openxmlformats.org/drawingml/2006/main">
-            <a:off x="1162050" y="4076700"/>
+            <a:off x="1162050" y="4648200"/>
             <a:ext cx="419100" cy="419100"/>
           </a:xfrm>
           <a:prstGeom xmlns:a="http://schemas.openxmlformats.org/drawingml/2006/main" prst="ellipse">
@@ -4274,7 +4438,7 @@
         </p:nvSpPr>
         <p:spPr>
           <a:xfrm xmlns:a="http://schemas.openxmlformats.org/drawingml/2006/main">
-            <a:off x="1162050" y="4171950"/>
+            <a:off x="1162050" y="4743450"/>
             <a:ext cx="419100" cy="209550"/>
           </a:xfrm>
           <a:prstGeom xmlns:a="http://schemas.openxmlformats.org/drawingml/2006/main" prst="rect">
@@ -4331,8 +4495,8 @@
         </p:nvSpPr>
         <p:spPr>
           <a:xfrm xmlns:a="http://schemas.openxmlformats.org/drawingml/2006/main">
-            <a:off x="1752600" y="4057650"/>
-            <a:ext cx="3429000" cy="228600"/>
+            <a:off x="1752600" y="4610100"/>
+            <a:ext cx="3619500" cy="228600"/>
           </a:xfrm>
           <a:prstGeom xmlns:a="http://schemas.openxmlformats.org/drawingml/2006/main" prst="rect">
             <a:avLst/>
@@ -4349,7 +4513,7 @@
           <a:p xmlns:a="http://schemas.openxmlformats.org/drawingml/2006/main">
             <a:pPr>
               <a:buNone/>
-              <a:defRPr sz="1575" b="1">
+              <a:defRPr sz="1350" b="1">
                 <a:solidFill>
                   <a:srgbClr val="111827"/>
                 </a:solidFill>
@@ -4359,7 +4523,7 @@
               </a:defRPr>
             </a:pPr>
             <a:r>
-              <a:rPr sz="1575" b="1">
+              <a:rPr sz="1350" b="1">
                 <a:solidFill>
                   <a:srgbClr val="111827"/>
                 </a:solidFill>
@@ -4367,7 +4531,7 @@
                 <a:ea typeface="PingFang SC"/>
                 <a:cs typeface="PingFang SC"/>
               </a:rPr>
-              <a:t>业务侧：无反馈条件下的监督与度量</a:t>
+              <a:t>业务侧｜无反馈条件下的监督与度量</a:t>
             </a:r>
           </a:p>
         </p:txBody>
@@ -4388,8 +4552,8 @@
         </p:nvSpPr>
         <p:spPr>
           <a:xfrm xmlns:a="http://schemas.openxmlformats.org/drawingml/2006/main">
-            <a:off x="1752600" y="4381500"/>
-            <a:ext cx="3524250" cy="266700"/>
+            <a:off x="1752600" y="4914900"/>
+            <a:ext cx="3524250" cy="381000"/>
           </a:xfrm>
           <a:prstGeom xmlns:a="http://schemas.openxmlformats.org/drawingml/2006/main" prst="rect">
             <a:avLst/>
@@ -4406,25 +4570,49 @@
           <a:p xmlns:a="http://schemas.openxmlformats.org/drawingml/2006/main">
             <a:pPr>
               <a:buNone/>
-              <a:defRPr sz="1125" b="0">
-                <a:solidFill>
-                  <a:srgbClr val="344054"/>
-                </a:solidFill>
-                <a:latin typeface="PingFang SC"/>
-                <a:ea typeface="PingFang SC"/>
-                <a:cs typeface="PingFang SC"/>
-              </a:defRPr>
-            </a:pPr>
-            <a:r>
-              <a:rPr sz="1125" b="0">
-                <a:solidFill>
-                  <a:srgbClr val="344054"/>
-                </a:solidFill>
-                <a:latin typeface="PingFang SC"/>
-                <a:ea typeface="PingFang SC"/>
-                <a:cs typeface="PingFang SC"/>
-              </a:rPr>
-              <a:t>冷启动缺少真实行为反馈，需要代理监督与评估体系</a:t>
+              <a:defRPr sz="1050" b="0">
+                <a:solidFill>
+                  <a:srgbClr val="4A5368"/>
+                </a:solidFill>
+                <a:latin typeface="PingFang SC"/>
+                <a:ea typeface="PingFang SC"/>
+                <a:cs typeface="PingFang SC"/>
+              </a:defRPr>
+            </a:pPr>
+            <a:r>
+              <a:rPr sz="1050" b="0">
+                <a:solidFill>
+                  <a:srgbClr val="4A5368"/>
+                </a:solidFill>
+                <a:latin typeface="PingFang SC"/>
+                <a:ea typeface="PingFang SC"/>
+                <a:cs typeface="PingFang SC"/>
+              </a:rPr>
+              <a:t>冷启动缺少真实行为反馈，需要构建可靠监督信号，</a:t>
+            </a:r>
+          </a:p>
+          <a:p xmlns:a="http://schemas.openxmlformats.org/drawingml/2006/main">
+            <a:pPr>
+              <a:buNone/>
+              <a:defRPr sz="1050" b="0">
+                <a:solidFill>
+                  <a:srgbClr val="4A5368"/>
+                </a:solidFill>
+                <a:latin typeface="PingFang SC"/>
+                <a:ea typeface="PingFang SC"/>
+                <a:cs typeface="PingFang SC"/>
+              </a:defRPr>
+            </a:pPr>
+            <a:r>
+              <a:rPr sz="1050" b="0">
+                <a:solidFill>
+                  <a:srgbClr val="4A5368"/>
+                </a:solidFill>
+                <a:latin typeface="PingFang SC"/>
+                <a:ea typeface="PingFang SC"/>
+                <a:cs typeface="PingFang SC"/>
+              </a:rPr>
+              <a:t>并用代理评估论证与业务价值的一致性。</a:t>
             </a:r>
           </a:p>
         </p:txBody>
@@ -4445,8 +4633,8 @@
         </p:nvSpPr>
         <p:spPr>
           <a:xfrm xmlns:a="http://schemas.openxmlformats.org/drawingml/2006/main">
-            <a:off x="6248400" y="3867150"/>
-            <a:ext cx="4762500" cy="933450"/>
+            <a:off x="6248400" y="4419600"/>
+            <a:ext cx="4762500" cy="1047750"/>
           </a:xfrm>
           <a:prstGeom xmlns:a="http://schemas.openxmlformats.org/drawingml/2006/main" prst="roundRect">
             <a:avLst>
@@ -4486,7 +4674,7 @@
         </p:nvSpPr>
         <p:spPr>
           <a:xfrm xmlns:a="http://schemas.openxmlformats.org/drawingml/2006/main">
-            <a:off x="6257925" y="3876675"/>
+            <a:off x="6257925" y="4429125"/>
             <a:ext cx="4743450" cy="38100"/>
           </a:xfrm>
           <a:prstGeom xmlns:a="http://schemas.openxmlformats.org/drawingml/2006/main" prst="rect">
@@ -4517,7 +4705,7 @@
         </p:nvSpPr>
         <p:spPr>
           <a:xfrm xmlns:a="http://schemas.openxmlformats.org/drawingml/2006/main">
-            <a:off x="6457950" y="4076700"/>
+            <a:off x="6457950" y="4648200"/>
             <a:ext cx="419100" cy="419100"/>
           </a:xfrm>
           <a:prstGeom xmlns:a="http://schemas.openxmlformats.org/drawingml/2006/main" prst="ellipse">
@@ -4548,7 +4736,7 @@
         </p:nvSpPr>
         <p:spPr>
           <a:xfrm xmlns:a="http://schemas.openxmlformats.org/drawingml/2006/main">
-            <a:off x="6457950" y="4171950"/>
+            <a:off x="6457950" y="4743450"/>
             <a:ext cx="419100" cy="209550"/>
           </a:xfrm>
           <a:prstGeom xmlns:a="http://schemas.openxmlformats.org/drawingml/2006/main" prst="rect">
@@ -4605,8 +4793,8 @@
         </p:nvSpPr>
         <p:spPr>
           <a:xfrm xmlns:a="http://schemas.openxmlformats.org/drawingml/2006/main">
-            <a:off x="7048500" y="4057650"/>
-            <a:ext cx="3429000" cy="228600"/>
+            <a:off x="7048500" y="4610100"/>
+            <a:ext cx="3619500" cy="228600"/>
           </a:xfrm>
           <a:prstGeom xmlns:a="http://schemas.openxmlformats.org/drawingml/2006/main" prst="rect">
             <a:avLst/>
@@ -4623,7 +4811,7 @@
           <a:p xmlns:a="http://schemas.openxmlformats.org/drawingml/2006/main">
             <a:pPr>
               <a:buNone/>
-              <a:defRPr sz="1575" b="1">
+              <a:defRPr sz="1350" b="1">
                 <a:solidFill>
                   <a:srgbClr val="111827"/>
                 </a:solidFill>
@@ -4633,7 +4821,7 @@
               </a:defRPr>
             </a:pPr>
             <a:r>
-              <a:rPr sz="1575" b="1">
+              <a:rPr sz="1350" b="1">
                 <a:solidFill>
                   <a:srgbClr val="111827"/>
                 </a:solidFill>
@@ -4641,7 +4829,7 @@
                 <a:ea typeface="PingFang SC"/>
                 <a:cs typeface="PingFang SC"/>
               </a:rPr>
-              <a:t>工程侧：推理成本与增量更新</a:t>
+              <a:t>工程侧｜推理成本与增量更新</a:t>
             </a:r>
           </a:p>
         </p:txBody>
@@ -4662,8 +4850,8 @@
         </p:nvSpPr>
         <p:spPr>
           <a:xfrm xmlns:a="http://schemas.openxmlformats.org/drawingml/2006/main">
-            <a:off x="7048500" y="4381500"/>
-            <a:ext cx="3524250" cy="266700"/>
+            <a:off x="7048500" y="4914900"/>
+            <a:ext cx="3524250" cy="381000"/>
           </a:xfrm>
           <a:prstGeom xmlns:a="http://schemas.openxmlformats.org/drawingml/2006/main" prst="rect">
             <a:avLst/>
@@ -4680,25 +4868,49 @@
           <a:p xmlns:a="http://schemas.openxmlformats.org/drawingml/2006/main">
             <a:pPr>
               <a:buNone/>
-              <a:defRPr sz="1125" b="0">
-                <a:solidFill>
-                  <a:srgbClr val="344054"/>
-                </a:solidFill>
-                <a:latin typeface="PingFang SC"/>
-                <a:ea typeface="PingFang SC"/>
-                <a:cs typeface="PingFang SC"/>
-              </a:defRPr>
-            </a:pPr>
-            <a:r>
-              <a:rPr sz="1125" b="0">
-                <a:solidFill>
-                  <a:srgbClr val="344054"/>
-                </a:solidFill>
-                <a:latin typeface="PingFang SC"/>
-                <a:ea typeface="PingFang SC"/>
-                <a:cs typeface="PingFang SC"/>
-              </a:rPr>
-              <a:t>在时延 SLA 下重设计推理，并支撑 SID 与候选池增量更新</a:t>
+              <a:defRPr sz="1050" b="0">
+                <a:solidFill>
+                  <a:srgbClr val="4A5368"/>
+                </a:solidFill>
+                <a:latin typeface="PingFang SC"/>
+                <a:ea typeface="PingFang SC"/>
+                <a:cs typeface="PingFang SC"/>
+              </a:defRPr>
+            </a:pPr>
+            <a:r>
+              <a:rPr sz="1050" b="0">
+                <a:solidFill>
+                  <a:srgbClr val="4A5368"/>
+                </a:solidFill>
+                <a:latin typeface="PingFang SC"/>
+                <a:ea typeface="PingFang SC"/>
+                <a:cs typeface="PingFang SC"/>
+              </a:rPr>
+              <a:t>显式 CoT 成本高，需在 SLA 下重设计推理架构，</a:t>
+            </a:r>
+          </a:p>
+          <a:p xmlns:a="http://schemas.openxmlformats.org/drawingml/2006/main">
+            <a:pPr>
+              <a:buNone/>
+              <a:defRPr sz="1050" b="0">
+                <a:solidFill>
+                  <a:srgbClr val="4A5368"/>
+                </a:solidFill>
+                <a:latin typeface="PingFang SC"/>
+                <a:ea typeface="PingFang SC"/>
+                <a:cs typeface="PingFang SC"/>
+              </a:defRPr>
+            </a:pPr>
+            <a:r>
+              <a:rPr sz="1050" b="0">
+                <a:solidFill>
+                  <a:srgbClr val="4A5368"/>
+                </a:solidFill>
+                <a:latin typeface="PingFang SC"/>
+                <a:ea typeface="PingFang SC"/>
+                <a:cs typeface="PingFang SC"/>
+              </a:rPr>
+              <a:t>并打通 SID、约束解码、候选池的增量更新。</a:t>
             </a:r>
           </a:p>
         </p:txBody>
@@ -4719,7 +4931,7 @@
         </p:nvSpPr>
         <p:spPr>
           <a:xfrm xmlns:a="http://schemas.openxmlformats.org/drawingml/2006/main">
-            <a:off x="1447800" y="5638800"/>
+            <a:off x="1409700" y="5924550"/>
             <a:ext cx="9334500" cy="266700"/>
           </a:xfrm>
           <a:prstGeom xmlns:a="http://schemas.openxmlformats.org/drawingml/2006/main" prst="rect">
@@ -4755,7 +4967,63 @@
                 <a:ea typeface="PingFang SC"/>
                 <a:cs typeface="PingFang SC"/>
               </a:rPr>
-              <a:t>核心判断：目标不是单点推荐模型，而是面向推荐、搜索、题目理解的统一能力底座。</a:t>
+              <a:t>核心判断：目标不是单点推荐模型，而是可训练、可隔离、可评估、可增量更新的统一能力底座。</a:t>
+            </a:r>
+          </a:p>
+        </p:txBody>
+      </p:sp>
+      <p:sp>
+        <p:nvSpPr>
+          <p:cNvPr id="38" name="">
+            <a:extLst xmlns:a="http://schemas.openxmlformats.org/drawingml/2006/main">
+              <a:ext uri="{FF2B5EF4-FFF2-40B4-BE49-F238E27FC236}">
+                <a16:creationId xmlns:a16="http://schemas.microsoft.com/office/drawing/2014/main" id="{EA65D008-FF88-4A18-8784-113102BCBD87}"/>
+              </a:ext>
+            </a:extLst>
+          </p:cNvPr>
+          <p:cNvSpPr>
+            <a:spLocks xmlns:a="http://schemas.openxmlformats.org/drawingml/2006/main" noGrp="1"/>
+          </p:cNvSpPr>
+          <p:nvPr/>
+        </p:nvSpPr>
+        <p:spPr>
+          <a:xfrm xmlns:a="http://schemas.openxmlformats.org/drawingml/2006/main">
+            <a:off x="800100" y="2724150"/>
+            <a:ext cx="2286000" cy="266700"/>
+          </a:xfrm>
+          <a:prstGeom xmlns:a="http://schemas.openxmlformats.org/drawingml/2006/main" prst="rect">
+            <a:avLst/>
+          </a:prstGeom>
+          <a:noFill xmlns:a="http://schemas.openxmlformats.org/drawingml/2006/main"/>
+          <a:ln xmlns:a="http://schemas.openxmlformats.org/drawingml/2006/main" w="0">
+            <a:noFill/>
+            <a:prstDash val="solid"/>
+          </a:ln>
+        </p:spPr>
+        <p:txBody>
+          <a:bodyPr xmlns:a="http://schemas.openxmlformats.org/drawingml/2006/main" wrap="square" lIns="0" tIns="0" rIns="0" bIns="0"/>
+          <a:lstStyle xmlns:a="http://schemas.openxmlformats.org/drawingml/2006/main"/>
+          <a:p xmlns:a="http://schemas.openxmlformats.org/drawingml/2006/main">
+            <a:pPr>
+              <a:defRPr sz="1650" b="1">
+                <a:solidFill>
+                  <a:srgbClr val="15192F"/>
+                </a:solidFill>
+                <a:latin typeface="PingFang SC"/>
+                <a:ea typeface="PingFang SC"/>
+                <a:cs typeface="PingFang SC"/>
+              </a:defRPr>
+            </a:pPr>
+            <a:r>
+              <a:rPr sz="1650" b="1">
+                <a:solidFill>
+                  <a:srgbClr val="15192F"/>
+                </a:solidFill>
+                <a:latin typeface="PingFang SC"/>
+                <a:ea typeface="PingFang SC"/>
+                <a:cs typeface="PingFang SC"/>
+              </a:rPr>
+              <a:t>问题与挑战</a:t>
             </a:r>
           </a:p>
         </p:txBody>

--- a/output/sections/02-背景与目标.pptx
+++ b/output/sections/02-背景与目标.pptx
@@ -2,15 +2,15 @@
 <file path=ppt/presentation.xml><?xml version="1.0" encoding="utf-8"?>
 <p:presentation xmlns:p="http://schemas.openxmlformats.org/presentationml/2006/main">
   <p:sldMasterIdLst>
-    <p:sldMasterId xmlns:r="http://schemas.openxmlformats.org/officeDocument/2006/relationships" id="2147483648" r:id="R314d2c53b2d3463b"/>
+    <p:sldMasterId xmlns:r="http://schemas.openxmlformats.org/officeDocument/2006/relationships" id="2147483648" r:id="Rf0a88c16df96400c"/>
   </p:sldMasterIdLst>
   <p:notesMasterIdLst>
-    <p:notesMasterId xmlns:r="http://schemas.openxmlformats.org/officeDocument/2006/relationships" r:id="Rb56c637435f54d1e"/>
+    <p:notesMasterId xmlns:r="http://schemas.openxmlformats.org/officeDocument/2006/relationships" r:id="Rb69a79ffcfa442a7"/>
   </p:notesMasterIdLst>
   <p:sldIdLst>
-    <p:sldId xmlns:r="http://schemas.openxmlformats.org/officeDocument/2006/relationships" id="256" r:id="R418117ac1e0b49b3"/>
-    <p:sldId xmlns:r="http://schemas.openxmlformats.org/officeDocument/2006/relationships" id="257" r:id="Rd3d2f0bcf7a04cee"/>
-    <p:sldId xmlns:r="http://schemas.openxmlformats.org/officeDocument/2006/relationships" id="258" r:id="R077f42e778df442b"/>
+    <p:sldId xmlns:r="http://schemas.openxmlformats.org/officeDocument/2006/relationships" id="256" r:id="R7b0ddc42e2d7486b"/>
+    <p:sldId xmlns:r="http://schemas.openxmlformats.org/officeDocument/2006/relationships" id="257" r:id="Rb742b2857b394cb7"/>
+    <p:sldId xmlns:r="http://schemas.openxmlformats.org/officeDocument/2006/relationships" id="258" r:id="Rf536e0d672d14cc3"/>
   </p:sldIdLst>
   <p:sldSz cx="12192000" cy="6858000"/>
   <p:notesSz cx="6858000" cy="9144000"/>
@@ -735,7 +735,7 @@
   </p:cSld>
   <p:clrMap bg1="lt1" tx1="dk1" bg2="lt2" tx2="dk2" accent1="accent1" accent2="accent2" accent3="accent3" accent4="accent4" accent5="accent5" accent6="accent6" hlink="hlink" folHlink="folHlink"/>
   <p:sldLayoutIdLst>
-    <p:sldLayoutId xmlns:r="http://schemas.openxmlformats.org/officeDocument/2006/relationships" id="2147483649" r:id="Rb375b453988d4042"/>
+    <p:sldLayoutId xmlns:r="http://schemas.openxmlformats.org/officeDocument/2006/relationships" id="2147483649" r:id="R8258849d95d54ae5"/>
   </p:sldLayoutIdLst>
   <p:txStyles>
     <p:titleStyle>
@@ -1290,7 +1290,7 @@
           <p:nvPr/>
         </p:nvPicPr>
         <p:blipFill>
-          <a:blip xmlns:r="http://schemas.openxmlformats.org/officeDocument/2006/relationships" xmlns:a="http://schemas.openxmlformats.org/drawingml/2006/main" r:embed="Rf5f953c230f34114"/>
+          <a:blip xmlns:r="http://schemas.openxmlformats.org/officeDocument/2006/relationships" xmlns:a="http://schemas.openxmlformats.org/drawingml/2006/main" r:embed="R2b8aa8d7f64647d7"/>
           <a:srcRect xmlns:a="http://schemas.openxmlformats.org/drawingml/2006/main" l="0" t="21875" r="0" b="21875"/>
           <a:stretch xmlns:a="http://schemas.openxmlformats.org/drawingml/2006/main">
             <a:fillRect l="0" t="0" r="0" b="0"/>
@@ -1311,7 +1311,7 @@
           <p:cNvPr id="2" name="">
             <a:extLst xmlns:a="http://schemas.openxmlformats.org/drawingml/2006/main">
               <a:ext uri="{FF2B5EF4-FFF2-40B4-BE49-F238E27FC236}">
-                <a16:creationId xmlns:a16="http://schemas.microsoft.com/office/drawing/2014/main" id="{5D392D79-F17E-4C89-9820-9CE5CE1FC292}"/>
+                <a16:creationId xmlns:a16="http://schemas.microsoft.com/office/drawing/2014/main" id="{F9830D38-FF04-423C-90B0-4B5EBA041D5F}"/>
               </a:ext>
             </a:extLst>
           </p:cNvPr>
@@ -1344,7 +1344,7 @@
           <p:cNvPr id="3" name="">
             <a:extLst xmlns:a="http://schemas.openxmlformats.org/drawingml/2006/main">
               <a:ext uri="{FF2B5EF4-FFF2-40B4-BE49-F238E27FC236}">
-                <a16:creationId xmlns:a16="http://schemas.microsoft.com/office/drawing/2014/main" id="{D76AF702-BAC6-4795-A9E1-373F82578243}"/>
+                <a16:creationId xmlns:a16="http://schemas.microsoft.com/office/drawing/2014/main" id="{1605CDB4-025F-46C6-81B1-1A6FED3524F1}"/>
               </a:ext>
             </a:extLst>
           </p:cNvPr>
@@ -1379,7 +1379,7 @@
           <p:nvPr/>
         </p:nvPicPr>
         <p:blipFill>
-          <a:blip xmlns:r="http://schemas.openxmlformats.org/officeDocument/2006/relationships" xmlns:a="http://schemas.openxmlformats.org/drawingml/2006/main" r:embed="R88c2aaec19de4b6d"/>
+          <a:blip xmlns:r="http://schemas.openxmlformats.org/officeDocument/2006/relationships" xmlns:a="http://schemas.openxmlformats.org/drawingml/2006/main" r:embed="Rff88ba3fcf584dbf"/>
           <a:stretch xmlns:a="http://schemas.openxmlformats.org/drawingml/2006/main"/>
         </p:blipFill>
         <p:spPr>
@@ -1397,7 +1397,7 @@
           <p:cNvPr id="5" name="">
             <a:extLst xmlns:a="http://schemas.openxmlformats.org/drawingml/2006/main">
               <a:ext uri="{FF2B5EF4-FFF2-40B4-BE49-F238E27FC236}">
-                <a16:creationId xmlns:a16="http://schemas.microsoft.com/office/drawing/2014/main" id="{378F688B-CE6B-47FA-9B8E-4AE0CBFB9D20}"/>
+                <a16:creationId xmlns:a16="http://schemas.microsoft.com/office/drawing/2014/main" id="{8DCA13DC-5CE9-4DD7-BED1-23DC2BA704CF}"/>
               </a:ext>
             </a:extLst>
           </p:cNvPr>
@@ -1453,7 +1453,7 @@
           <p:cNvPr id="6" name="">
             <a:extLst xmlns:a="http://schemas.openxmlformats.org/drawingml/2006/main">
               <a:ext uri="{FF2B5EF4-FFF2-40B4-BE49-F238E27FC236}">
-                <a16:creationId xmlns:a16="http://schemas.microsoft.com/office/drawing/2014/main" id="{9F2C8053-9A93-4C78-8874-A0D31824EE10}"/>
+                <a16:creationId xmlns:a16="http://schemas.microsoft.com/office/drawing/2014/main" id="{D1882425-7EFB-4D5B-B5F2-2B7F3DED5EF5}"/>
               </a:ext>
             </a:extLst>
           </p:cNvPr>
@@ -1509,7 +1509,7 @@
           <p:cNvPr id="7" name="">
             <a:extLst xmlns:a="http://schemas.openxmlformats.org/drawingml/2006/main">
               <a:ext uri="{FF2B5EF4-FFF2-40B4-BE49-F238E27FC236}">
-                <a16:creationId xmlns:a16="http://schemas.microsoft.com/office/drawing/2014/main" id="{0B528483-87B3-4E84-AEE0-BF6F344A920E}"/>
+                <a16:creationId xmlns:a16="http://schemas.microsoft.com/office/drawing/2014/main" id="{BAC0FB66-95D0-4D18-8964-CA841F6442A6}"/>
               </a:ext>
             </a:extLst>
           </p:cNvPr>
@@ -1565,7 +1565,7 @@
           <p:cNvPr id="8" name="">
             <a:extLst xmlns:a="http://schemas.openxmlformats.org/drawingml/2006/main">
               <a:ext uri="{FF2B5EF4-FFF2-40B4-BE49-F238E27FC236}">
-                <a16:creationId xmlns:a16="http://schemas.microsoft.com/office/drawing/2014/main" id="{2A91450C-DCEA-41E1-8CBF-FC3D78F064BD}"/>
+                <a16:creationId xmlns:a16="http://schemas.microsoft.com/office/drawing/2014/main" id="{E3485DA1-7CA7-4812-B74E-6F23DADDE326}"/>
               </a:ext>
             </a:extLst>
           </p:cNvPr>
@@ -1621,7 +1621,7 @@
           <p:cNvPr id="9" name="">
             <a:extLst xmlns:a="http://schemas.openxmlformats.org/drawingml/2006/main">
               <a:ext uri="{FF2B5EF4-FFF2-40B4-BE49-F238E27FC236}">
-                <a16:creationId xmlns:a16="http://schemas.microsoft.com/office/drawing/2014/main" id="{601C58CF-E952-40FC-A470-273DA7162778}"/>
+                <a16:creationId xmlns:a16="http://schemas.microsoft.com/office/drawing/2014/main" id="{A79C6C4B-A8B1-403A-9A0A-925076DC6645}"/>
               </a:ext>
             </a:extLst>
           </p:cNvPr>
@@ -1652,7 +1652,7 @@
           <p:cNvPr id="10" name="">
             <a:extLst xmlns:a="http://schemas.openxmlformats.org/drawingml/2006/main">
               <a:ext uri="{FF2B5EF4-FFF2-40B4-BE49-F238E27FC236}">
-                <a16:creationId xmlns:a16="http://schemas.microsoft.com/office/drawing/2014/main" id="{2C55CA8D-3CC6-4B34-895B-AA10D7F21BB0}"/>
+                <a16:creationId xmlns:a16="http://schemas.microsoft.com/office/drawing/2014/main" id="{579578A6-2313-4EBC-BE8A-1975C02F338D}"/>
               </a:ext>
             </a:extLst>
           </p:cNvPr>
@@ -1706,7 +1706,7 @@
     </p:spTree>
     <p:extLst>
       <p:ext uri="{BB962C8B-B14F-4D97-AF65-F5344CB8AC3E}">
-        <p14:creationId xmlns:p14="http://schemas.microsoft.com/office/powerpoint/2010/main" val="88473468"/>
+        <p14:creationId xmlns:p14="http://schemas.microsoft.com/office/powerpoint/2010/main" val="1574438492"/>
       </p:ext>
     </p:extLst>
   </p:cSld>
@@ -1741,7 +1741,7 @@
           <p:nvPr/>
         </p:nvPicPr>
         <p:blipFill>
-          <a:blip xmlns:r="http://schemas.openxmlformats.org/officeDocument/2006/relationships" xmlns:a="http://schemas.openxmlformats.org/drawingml/2006/main" r:embed="Re9b16e91ce9947ce"/>
+          <a:blip xmlns:r="http://schemas.openxmlformats.org/officeDocument/2006/relationships" xmlns:a="http://schemas.openxmlformats.org/drawingml/2006/main" r:embed="R2d6cd9afe2b745c6"/>
           <a:stretch xmlns:a="http://schemas.openxmlformats.org/drawingml/2006/main"/>
         </p:blipFill>
         <p:spPr>
@@ -2047,7 +2047,7 @@
                 <a:ea typeface="PingFang SC"/>
                 <a:cs typeface="PingFang SC"/>
               </a:rPr>
-              <a:t>背景与目标 | 为什么需要第三条路线</a:t>
+              <a:t>背景与目标 | 为什么需要 OneRec</a:t>
             </a:r>
           </a:p>
         </p:txBody>
@@ -2301,8 +2301,8 @@
         </p:nvSpPr>
         <p:spPr>
           <a:xfrm xmlns:a="http://schemas.openxmlformats.org/drawingml/2006/main">
-            <a:off x="800100" y="2247900"/>
-            <a:ext cx="6572250" cy="400050"/>
+            <a:off x="800100" y="2266950"/>
+            <a:ext cx="6572250" cy="266700"/>
           </a:xfrm>
           <a:prstGeom xmlns:a="http://schemas.openxmlformats.org/drawingml/2006/main" prst="rect">
             <a:avLst/>
@@ -2338,30 +2338,6 @@
                 <a:cs typeface="PingFang SC"/>
               </a:rPr>
               <a:t>核心矛盾：Agent 解释强但慢，判别式推荐快但黑盒</a:t>
-            </a:r>
-          </a:p>
-          <a:p xmlns:a="http://schemas.openxmlformats.org/drawingml/2006/main">
-            <a:pPr>
-              <a:buNone/>
-              <a:defRPr sz="1500" b="1">
-                <a:solidFill>
-                  <a:srgbClr val="344054"/>
-                </a:solidFill>
-                <a:latin typeface="PingFang SC"/>
-                <a:ea typeface="PingFang SC"/>
-                <a:cs typeface="PingFang SC"/>
-              </a:defRPr>
-            </a:pPr>
-            <a:r>
-              <a:rPr sz="1500" b="1">
-                <a:solidFill>
-                  <a:srgbClr val="344054"/>
-                </a:solidFill>
-                <a:latin typeface="PingFang SC"/>
-                <a:ea typeface="PingFang SC"/>
-                <a:cs typeface="PingFang SC"/>
-              </a:rPr>
-              <a:t>需要第三条路线补齐“时效性 + 可解释性”双目标。</a:t>
             </a:r>
           </a:p>
         </p:txBody>
@@ -3054,7 +3030,7 @@
           <p:nvPr/>
         </p:nvPicPr>
         <p:blipFill>
-          <a:blip xmlns:r="http://schemas.openxmlformats.org/officeDocument/2006/relationships" xmlns:a="http://schemas.openxmlformats.org/drawingml/2006/main" r:embed="R8a0b731f171c4ffa"/>
+          <a:blip xmlns:r="http://schemas.openxmlformats.org/officeDocument/2006/relationships" xmlns:a="http://schemas.openxmlformats.org/drawingml/2006/main" r:embed="Rda7df439bf50445c"/>
           <a:stretch xmlns:a="http://schemas.openxmlformats.org/drawingml/2006/main"/>
         </p:blipFill>
         <p:spPr>
@@ -3186,7 +3162,7 @@
           <p:nvPr/>
         </p:nvPicPr>
         <p:blipFill>
-          <a:blip xmlns:r="http://schemas.openxmlformats.org/officeDocument/2006/relationships" xmlns:a="http://schemas.openxmlformats.org/drawingml/2006/main" r:embed="R8d07f21d2e26420e"/>
+          <a:blip xmlns:r="http://schemas.openxmlformats.org/officeDocument/2006/relationships" xmlns:a="http://schemas.openxmlformats.org/drawingml/2006/main" r:embed="R86377f10b5094c84"/>
           <a:stretch xmlns:a="http://schemas.openxmlformats.org/drawingml/2006/main"/>
         </p:blipFill>
         <p:spPr>
@@ -3739,8 +3715,8 @@
         </p:nvSpPr>
         <p:spPr>
           <a:xfrm xmlns:a="http://schemas.openxmlformats.org/drawingml/2006/main">
-            <a:off x="952500" y="3143250"/>
-            <a:ext cx="4762500" cy="1047750"/>
+            <a:off x="952500" y="3105150"/>
+            <a:ext cx="4762500" cy="1143000"/>
           </a:xfrm>
           <a:prstGeom xmlns:a="http://schemas.openxmlformats.org/drawingml/2006/main" prst="roundRect">
             <a:avLst>
@@ -3780,7 +3756,7 @@
         </p:nvSpPr>
         <p:spPr>
           <a:xfrm xmlns:a="http://schemas.openxmlformats.org/drawingml/2006/main">
-            <a:off x="962025" y="3152775"/>
+            <a:off x="962025" y="3114675"/>
             <a:ext cx="4743450" cy="38100"/>
           </a:xfrm>
           <a:prstGeom xmlns:a="http://schemas.openxmlformats.org/drawingml/2006/main" prst="rect">
@@ -3811,7 +3787,7 @@
         </p:nvSpPr>
         <p:spPr>
           <a:xfrm xmlns:a="http://schemas.openxmlformats.org/drawingml/2006/main">
-            <a:off x="1162050" y="3371850"/>
+            <a:off x="1162050" y="3352800"/>
             <a:ext cx="419100" cy="419100"/>
           </a:xfrm>
           <a:prstGeom xmlns:a="http://schemas.openxmlformats.org/drawingml/2006/main" prst="ellipse">
@@ -3842,7 +3818,7 @@
         </p:nvSpPr>
         <p:spPr>
           <a:xfrm xmlns:a="http://schemas.openxmlformats.org/drawingml/2006/main">
-            <a:off x="1162050" y="3467100"/>
+            <a:off x="1162050" y="3448050"/>
             <a:ext cx="419100" cy="209550"/>
           </a:xfrm>
           <a:prstGeom xmlns:a="http://schemas.openxmlformats.org/drawingml/2006/main" prst="rect">
@@ -3899,7 +3875,7 @@
         </p:nvSpPr>
         <p:spPr>
           <a:xfrm xmlns:a="http://schemas.openxmlformats.org/drawingml/2006/main">
-            <a:off x="1752600" y="3333750"/>
+            <a:off x="1752600" y="3314700"/>
             <a:ext cx="3619500" cy="228600"/>
           </a:xfrm>
           <a:prstGeom xmlns:a="http://schemas.openxmlformats.org/drawingml/2006/main" prst="rect">
@@ -3957,7 +3933,7 @@
         <p:spPr>
           <a:xfrm xmlns:a="http://schemas.openxmlformats.org/drawingml/2006/main">
             <a:off x="1752600" y="3638550"/>
-            <a:ext cx="3524250" cy="381000"/>
+            <a:ext cx="3524250" cy="438150"/>
           </a:xfrm>
           <a:prstGeom xmlns:a="http://schemas.openxmlformats.org/drawingml/2006/main" prst="rect">
             <a:avLst/>
@@ -4037,8 +4013,8 @@
         </p:nvSpPr>
         <p:spPr>
           <a:xfrm xmlns:a="http://schemas.openxmlformats.org/drawingml/2006/main">
-            <a:off x="6248400" y="3143250"/>
-            <a:ext cx="4762500" cy="1047750"/>
+            <a:off x="6248400" y="3105150"/>
+            <a:ext cx="4762500" cy="1143000"/>
           </a:xfrm>
           <a:prstGeom xmlns:a="http://schemas.openxmlformats.org/drawingml/2006/main" prst="roundRect">
             <a:avLst>
@@ -4078,7 +4054,7 @@
         </p:nvSpPr>
         <p:spPr>
           <a:xfrm xmlns:a="http://schemas.openxmlformats.org/drawingml/2006/main">
-            <a:off x="6257925" y="3152775"/>
+            <a:off x="6257925" y="3114675"/>
             <a:ext cx="4743450" cy="38100"/>
           </a:xfrm>
           <a:prstGeom xmlns:a="http://schemas.openxmlformats.org/drawingml/2006/main" prst="rect">
@@ -4109,7 +4085,7 @@
         </p:nvSpPr>
         <p:spPr>
           <a:xfrm xmlns:a="http://schemas.openxmlformats.org/drawingml/2006/main">
-            <a:off x="6457950" y="3371850"/>
+            <a:off x="6457950" y="3352800"/>
             <a:ext cx="419100" cy="419100"/>
           </a:xfrm>
           <a:prstGeom xmlns:a="http://schemas.openxmlformats.org/drawingml/2006/main" prst="ellipse">
@@ -4140,7 +4116,7 @@
         </p:nvSpPr>
         <p:spPr>
           <a:xfrm xmlns:a="http://schemas.openxmlformats.org/drawingml/2006/main">
-            <a:off x="6457950" y="3467100"/>
+            <a:off x="6457950" y="3448050"/>
             <a:ext cx="419100" cy="209550"/>
           </a:xfrm>
           <a:prstGeom xmlns:a="http://schemas.openxmlformats.org/drawingml/2006/main" prst="rect">
@@ -4197,7 +4173,7 @@
         </p:nvSpPr>
         <p:spPr>
           <a:xfrm xmlns:a="http://schemas.openxmlformats.org/drawingml/2006/main">
-            <a:off x="7048500" y="3333750"/>
+            <a:off x="7048500" y="3314700"/>
             <a:ext cx="3619500" cy="228600"/>
           </a:xfrm>
           <a:prstGeom xmlns:a="http://schemas.openxmlformats.org/drawingml/2006/main" prst="rect">
@@ -4255,7 +4231,7 @@
         <p:spPr>
           <a:xfrm xmlns:a="http://schemas.openxmlformats.org/drawingml/2006/main">
             <a:off x="7048500" y="3638550"/>
-            <a:ext cx="3524250" cy="381000"/>
+            <a:ext cx="3524250" cy="438150"/>
           </a:xfrm>
           <a:prstGeom xmlns:a="http://schemas.openxmlformats.org/drawingml/2006/main" prst="rect">
             <a:avLst/>
@@ -4335,8 +4311,8 @@
         </p:nvSpPr>
         <p:spPr>
           <a:xfrm xmlns:a="http://schemas.openxmlformats.org/drawingml/2006/main">
-            <a:off x="952500" y="4419600"/>
-            <a:ext cx="4762500" cy="1047750"/>
+            <a:off x="952500" y="4552950"/>
+            <a:ext cx="4762500" cy="1143000"/>
           </a:xfrm>
           <a:prstGeom xmlns:a="http://schemas.openxmlformats.org/drawingml/2006/main" prst="roundRect">
             <a:avLst>
@@ -4376,7 +4352,7 @@
         </p:nvSpPr>
         <p:spPr>
           <a:xfrm xmlns:a="http://schemas.openxmlformats.org/drawingml/2006/main">
-            <a:off x="962025" y="4429125"/>
+            <a:off x="962025" y="4562475"/>
             <a:ext cx="4743450" cy="38100"/>
           </a:xfrm>
           <a:prstGeom xmlns:a="http://schemas.openxmlformats.org/drawingml/2006/main" prst="rect">
@@ -4407,7 +4383,7 @@
         </p:nvSpPr>
         <p:spPr>
           <a:xfrm xmlns:a="http://schemas.openxmlformats.org/drawingml/2006/main">
-            <a:off x="1162050" y="4648200"/>
+            <a:off x="1162050" y="4800600"/>
             <a:ext cx="419100" cy="419100"/>
           </a:xfrm>
           <a:prstGeom xmlns:a="http://schemas.openxmlformats.org/drawingml/2006/main" prst="ellipse">
@@ -4438,7 +4414,7 @@
         </p:nvSpPr>
         <p:spPr>
           <a:xfrm xmlns:a="http://schemas.openxmlformats.org/drawingml/2006/main">
-            <a:off x="1162050" y="4743450"/>
+            <a:off x="1162050" y="4895850"/>
             <a:ext cx="419100" cy="209550"/>
           </a:xfrm>
           <a:prstGeom xmlns:a="http://schemas.openxmlformats.org/drawingml/2006/main" prst="rect">
@@ -4495,7 +4471,7 @@
         </p:nvSpPr>
         <p:spPr>
           <a:xfrm xmlns:a="http://schemas.openxmlformats.org/drawingml/2006/main">
-            <a:off x="1752600" y="4610100"/>
+            <a:off x="1752600" y="4762500"/>
             <a:ext cx="3619500" cy="228600"/>
           </a:xfrm>
           <a:prstGeom xmlns:a="http://schemas.openxmlformats.org/drawingml/2006/main" prst="rect">
@@ -4552,8 +4528,8 @@
         </p:nvSpPr>
         <p:spPr>
           <a:xfrm xmlns:a="http://schemas.openxmlformats.org/drawingml/2006/main">
-            <a:off x="1752600" y="4914900"/>
-            <a:ext cx="3524250" cy="381000"/>
+            <a:off x="1752600" y="5086350"/>
+            <a:ext cx="3524250" cy="438150"/>
           </a:xfrm>
           <a:prstGeom xmlns:a="http://schemas.openxmlformats.org/drawingml/2006/main" prst="rect">
             <a:avLst/>
@@ -4633,8 +4609,8 @@
         </p:nvSpPr>
         <p:spPr>
           <a:xfrm xmlns:a="http://schemas.openxmlformats.org/drawingml/2006/main">
-            <a:off x="6248400" y="4419600"/>
-            <a:ext cx="4762500" cy="1047750"/>
+            <a:off x="6248400" y="4552950"/>
+            <a:ext cx="4762500" cy="1143000"/>
           </a:xfrm>
           <a:prstGeom xmlns:a="http://schemas.openxmlformats.org/drawingml/2006/main" prst="roundRect">
             <a:avLst>
@@ -4674,7 +4650,7 @@
         </p:nvSpPr>
         <p:spPr>
           <a:xfrm xmlns:a="http://schemas.openxmlformats.org/drawingml/2006/main">
-            <a:off x="6257925" y="4429125"/>
+            <a:off x="6257925" y="4562475"/>
             <a:ext cx="4743450" cy="38100"/>
           </a:xfrm>
           <a:prstGeom xmlns:a="http://schemas.openxmlformats.org/drawingml/2006/main" prst="rect">
@@ -4705,7 +4681,7 @@
         </p:nvSpPr>
         <p:spPr>
           <a:xfrm xmlns:a="http://schemas.openxmlformats.org/drawingml/2006/main">
-            <a:off x="6457950" y="4648200"/>
+            <a:off x="6457950" y="4800600"/>
             <a:ext cx="419100" cy="419100"/>
           </a:xfrm>
           <a:prstGeom xmlns:a="http://schemas.openxmlformats.org/drawingml/2006/main" prst="ellipse">
@@ -4736,7 +4712,7 @@
         </p:nvSpPr>
         <p:spPr>
           <a:xfrm xmlns:a="http://schemas.openxmlformats.org/drawingml/2006/main">
-            <a:off x="6457950" y="4743450"/>
+            <a:off x="6457950" y="4895850"/>
             <a:ext cx="419100" cy="209550"/>
           </a:xfrm>
           <a:prstGeom xmlns:a="http://schemas.openxmlformats.org/drawingml/2006/main" prst="rect">
@@ -4793,7 +4769,7 @@
         </p:nvSpPr>
         <p:spPr>
           <a:xfrm xmlns:a="http://schemas.openxmlformats.org/drawingml/2006/main">
-            <a:off x="7048500" y="4610100"/>
+            <a:off x="7048500" y="4762500"/>
             <a:ext cx="3619500" cy="228600"/>
           </a:xfrm>
           <a:prstGeom xmlns:a="http://schemas.openxmlformats.org/drawingml/2006/main" prst="rect">
@@ -4850,8 +4826,8 @@
         </p:nvSpPr>
         <p:spPr>
           <a:xfrm xmlns:a="http://schemas.openxmlformats.org/drawingml/2006/main">
-            <a:off x="7048500" y="4914900"/>
-            <a:ext cx="3524250" cy="381000"/>
+            <a:off x="7048500" y="5086350"/>
+            <a:ext cx="3524250" cy="438150"/>
           </a:xfrm>
           <a:prstGeom xmlns:a="http://schemas.openxmlformats.org/drawingml/2006/main" prst="rect">
             <a:avLst/>
@@ -4931,7 +4907,7 @@
         </p:nvSpPr>
         <p:spPr>
           <a:xfrm xmlns:a="http://schemas.openxmlformats.org/drawingml/2006/main">
-            <a:off x="1409700" y="5924550"/>
+            <a:off x="1447800" y="5638800"/>
             <a:ext cx="9334500" cy="266700"/>
           </a:xfrm>
           <a:prstGeom xmlns:a="http://schemas.openxmlformats.org/drawingml/2006/main" prst="rect">
@@ -4967,7 +4943,7 @@
                 <a:ea typeface="PingFang SC"/>
                 <a:cs typeface="PingFang SC"/>
               </a:rPr>
-              <a:t>核心判断：目标不是单点推荐模型，而是可训练、可隔离、可评估、可增量更新的统一能力底座。</a:t>
+              <a:t/>
             </a:r>
           </a:p>
         </p:txBody>
@@ -4977,18 +4953,18 @@
           <p:cNvPr id="38" name="">
             <a:extLst xmlns:a="http://schemas.openxmlformats.org/drawingml/2006/main">
               <a:ext uri="{FF2B5EF4-FFF2-40B4-BE49-F238E27FC236}">
-                <a16:creationId xmlns:a16="http://schemas.microsoft.com/office/drawing/2014/main" id="{EA65D008-FF88-4A18-8784-113102BCBD87}"/>
-              </a:ext>
-            </a:extLst>
-          </p:cNvPr>
-          <p:cNvSpPr>
-            <a:spLocks xmlns:a="http://schemas.openxmlformats.org/drawingml/2006/main" noGrp="1"/>
-          </p:cNvSpPr>
-          <p:nvPr/>
-        </p:nvSpPr>
-        <p:spPr>
-          <a:xfrm xmlns:a="http://schemas.openxmlformats.org/drawingml/2006/main">
-            <a:off x="800100" y="2724150"/>
+                <a16:creationId xmlns:a16="http://schemas.microsoft.com/office/drawing/2014/main" id="{06615CA6-4CBD-4CEE-BCDD-8EDA8906E705}"/>
+              </a:ext>
+            </a:extLst>
+          </p:cNvPr>
+          <p:cNvSpPr>
+            <a:spLocks xmlns:a="http://schemas.openxmlformats.org/drawingml/2006/main" noGrp="1"/>
+          </p:cNvSpPr>
+          <p:nvPr/>
+        </p:nvSpPr>
+        <p:spPr>
+          <a:xfrm xmlns:a="http://schemas.openxmlformats.org/drawingml/2006/main">
+            <a:off x="800100" y="2705100"/>
             <a:ext cx="2286000" cy="266700"/>
           </a:xfrm>
           <a:prstGeom xmlns:a="http://schemas.openxmlformats.org/drawingml/2006/main" prst="rect">

--- a/output/sections/02-背景与目标.pptx
+++ b/output/sections/02-背景与目标.pptx
@@ -2,15 +2,15 @@
 <file path=ppt/presentation.xml><?xml version="1.0" encoding="utf-8"?>
 <p:presentation xmlns:p="http://schemas.openxmlformats.org/presentationml/2006/main">
   <p:sldMasterIdLst>
-    <p:sldMasterId xmlns:r="http://schemas.openxmlformats.org/officeDocument/2006/relationships" id="2147483648" r:id="Rf0a88c16df96400c"/>
+    <p:sldMasterId xmlns:r="http://schemas.openxmlformats.org/officeDocument/2006/relationships" id="2147483648" r:id="Re2e956aeb4704d02"/>
   </p:sldMasterIdLst>
   <p:notesMasterIdLst>
-    <p:notesMasterId xmlns:r="http://schemas.openxmlformats.org/officeDocument/2006/relationships" r:id="Rb69a79ffcfa442a7"/>
+    <p:notesMasterId xmlns:r="http://schemas.openxmlformats.org/officeDocument/2006/relationships" r:id="Rfe4893e2ef994fe2"/>
   </p:notesMasterIdLst>
   <p:sldIdLst>
-    <p:sldId xmlns:r="http://schemas.openxmlformats.org/officeDocument/2006/relationships" id="256" r:id="R7b0ddc42e2d7486b"/>
-    <p:sldId xmlns:r="http://schemas.openxmlformats.org/officeDocument/2006/relationships" id="257" r:id="Rb742b2857b394cb7"/>
-    <p:sldId xmlns:r="http://schemas.openxmlformats.org/officeDocument/2006/relationships" id="258" r:id="Rf536e0d672d14cc3"/>
+    <p:sldId xmlns:r="http://schemas.openxmlformats.org/officeDocument/2006/relationships" id="256" r:id="R01cb9b1e84f143f9"/>
+    <p:sldId xmlns:r="http://schemas.openxmlformats.org/officeDocument/2006/relationships" id="257" r:id="R69da80eddabd485d"/>
+    <p:sldId xmlns:r="http://schemas.openxmlformats.org/officeDocument/2006/relationships" id="258" r:id="R462dd78bbb7645eb"/>
   </p:sldIdLst>
   <p:sldSz cx="12192000" cy="6858000"/>
   <p:notesSz cx="6858000" cy="9144000"/>
@@ -735,7 +735,7 @@
   </p:cSld>
   <p:clrMap bg1="lt1" tx1="dk1" bg2="lt2" tx2="dk2" accent1="accent1" accent2="accent2" accent3="accent3" accent4="accent4" accent5="accent5" accent6="accent6" hlink="hlink" folHlink="folHlink"/>
   <p:sldLayoutIdLst>
-    <p:sldLayoutId xmlns:r="http://schemas.openxmlformats.org/officeDocument/2006/relationships" id="2147483649" r:id="R8258849d95d54ae5"/>
+    <p:sldLayoutId xmlns:r="http://schemas.openxmlformats.org/officeDocument/2006/relationships" id="2147483649" r:id="R41a8e53068874f5e"/>
   </p:sldLayoutIdLst>
   <p:txStyles>
     <p:titleStyle>
@@ -1290,7 +1290,7 @@
           <p:nvPr/>
         </p:nvPicPr>
         <p:blipFill>
-          <a:blip xmlns:r="http://schemas.openxmlformats.org/officeDocument/2006/relationships" xmlns:a="http://schemas.openxmlformats.org/drawingml/2006/main" r:embed="R2b8aa8d7f64647d7"/>
+          <a:blip xmlns:r="http://schemas.openxmlformats.org/officeDocument/2006/relationships" xmlns:a="http://schemas.openxmlformats.org/drawingml/2006/main" r:embed="Rad67b08968424a35"/>
           <a:srcRect xmlns:a="http://schemas.openxmlformats.org/drawingml/2006/main" l="0" t="21875" r="0" b="21875"/>
           <a:stretch xmlns:a="http://schemas.openxmlformats.org/drawingml/2006/main">
             <a:fillRect l="0" t="0" r="0" b="0"/>
@@ -1311,7 +1311,7 @@
           <p:cNvPr id="2" name="">
             <a:extLst xmlns:a="http://schemas.openxmlformats.org/drawingml/2006/main">
               <a:ext uri="{FF2B5EF4-FFF2-40B4-BE49-F238E27FC236}">
-                <a16:creationId xmlns:a16="http://schemas.microsoft.com/office/drawing/2014/main" id="{F9830D38-FF04-423C-90B0-4B5EBA041D5F}"/>
+                <a16:creationId xmlns:a16="http://schemas.microsoft.com/office/drawing/2014/main" id="{BEE76648-E877-4368-9A2A-059A7FE925FA}"/>
               </a:ext>
             </a:extLst>
           </p:cNvPr>
@@ -1344,7 +1344,7 @@
           <p:cNvPr id="3" name="">
             <a:extLst xmlns:a="http://schemas.openxmlformats.org/drawingml/2006/main">
               <a:ext uri="{FF2B5EF4-FFF2-40B4-BE49-F238E27FC236}">
-                <a16:creationId xmlns:a16="http://schemas.microsoft.com/office/drawing/2014/main" id="{1605CDB4-025F-46C6-81B1-1A6FED3524F1}"/>
+                <a16:creationId xmlns:a16="http://schemas.microsoft.com/office/drawing/2014/main" id="{F853036D-85BC-4D5E-A0B3-F495D4ABEFFF}"/>
               </a:ext>
             </a:extLst>
           </p:cNvPr>
@@ -1379,7 +1379,7 @@
           <p:nvPr/>
         </p:nvPicPr>
         <p:blipFill>
-          <a:blip xmlns:r="http://schemas.openxmlformats.org/officeDocument/2006/relationships" xmlns:a="http://schemas.openxmlformats.org/drawingml/2006/main" r:embed="Rff88ba3fcf584dbf"/>
+          <a:blip xmlns:r="http://schemas.openxmlformats.org/officeDocument/2006/relationships" xmlns:a="http://schemas.openxmlformats.org/drawingml/2006/main" r:embed="R34bd55215b4a47f0"/>
           <a:stretch xmlns:a="http://schemas.openxmlformats.org/drawingml/2006/main"/>
         </p:blipFill>
         <p:spPr>
@@ -1397,7 +1397,7 @@
           <p:cNvPr id="5" name="">
             <a:extLst xmlns:a="http://schemas.openxmlformats.org/drawingml/2006/main">
               <a:ext uri="{FF2B5EF4-FFF2-40B4-BE49-F238E27FC236}">
-                <a16:creationId xmlns:a16="http://schemas.microsoft.com/office/drawing/2014/main" id="{8DCA13DC-5CE9-4DD7-BED1-23DC2BA704CF}"/>
+                <a16:creationId xmlns:a16="http://schemas.microsoft.com/office/drawing/2014/main" id="{663F86DF-C681-434F-AE29-F3AF987738D8}"/>
               </a:ext>
             </a:extLst>
           </p:cNvPr>
@@ -1453,7 +1453,7 @@
           <p:cNvPr id="6" name="">
             <a:extLst xmlns:a="http://schemas.openxmlformats.org/drawingml/2006/main">
               <a:ext uri="{FF2B5EF4-FFF2-40B4-BE49-F238E27FC236}">
-                <a16:creationId xmlns:a16="http://schemas.microsoft.com/office/drawing/2014/main" id="{D1882425-7EFB-4D5B-B5F2-2B7F3DED5EF5}"/>
+                <a16:creationId xmlns:a16="http://schemas.microsoft.com/office/drawing/2014/main" id="{A6904E59-B46C-493A-83B7-C505E2BEAF9E}"/>
               </a:ext>
             </a:extLst>
           </p:cNvPr>
@@ -1509,7 +1509,7 @@
           <p:cNvPr id="7" name="">
             <a:extLst xmlns:a="http://schemas.openxmlformats.org/drawingml/2006/main">
               <a:ext uri="{FF2B5EF4-FFF2-40B4-BE49-F238E27FC236}">
-                <a16:creationId xmlns:a16="http://schemas.microsoft.com/office/drawing/2014/main" id="{BAC0FB66-95D0-4D18-8964-CA841F6442A6}"/>
+                <a16:creationId xmlns:a16="http://schemas.microsoft.com/office/drawing/2014/main" id="{F7250834-EEFE-4D37-BA33-2E119476EA7D}"/>
               </a:ext>
             </a:extLst>
           </p:cNvPr>
@@ -1565,7 +1565,7 @@
           <p:cNvPr id="8" name="">
             <a:extLst xmlns:a="http://schemas.openxmlformats.org/drawingml/2006/main">
               <a:ext uri="{FF2B5EF4-FFF2-40B4-BE49-F238E27FC236}">
-                <a16:creationId xmlns:a16="http://schemas.microsoft.com/office/drawing/2014/main" id="{E3485DA1-7CA7-4812-B74E-6F23DADDE326}"/>
+                <a16:creationId xmlns:a16="http://schemas.microsoft.com/office/drawing/2014/main" id="{7520CDFA-542A-447C-BCBE-BC10C6F8EF9B}"/>
               </a:ext>
             </a:extLst>
           </p:cNvPr>
@@ -1621,7 +1621,7 @@
           <p:cNvPr id="9" name="">
             <a:extLst xmlns:a="http://schemas.openxmlformats.org/drawingml/2006/main">
               <a:ext uri="{FF2B5EF4-FFF2-40B4-BE49-F238E27FC236}">
-                <a16:creationId xmlns:a16="http://schemas.microsoft.com/office/drawing/2014/main" id="{A79C6C4B-A8B1-403A-9A0A-925076DC6645}"/>
+                <a16:creationId xmlns:a16="http://schemas.microsoft.com/office/drawing/2014/main" id="{08504A23-E32C-4460-8718-A18A6CA8CB88}"/>
               </a:ext>
             </a:extLst>
           </p:cNvPr>
@@ -1652,7 +1652,7 @@
           <p:cNvPr id="10" name="">
             <a:extLst xmlns:a="http://schemas.openxmlformats.org/drawingml/2006/main">
               <a:ext uri="{FF2B5EF4-FFF2-40B4-BE49-F238E27FC236}">
-                <a16:creationId xmlns:a16="http://schemas.microsoft.com/office/drawing/2014/main" id="{579578A6-2313-4EBC-BE8A-1975C02F338D}"/>
+                <a16:creationId xmlns:a16="http://schemas.microsoft.com/office/drawing/2014/main" id="{BB14CE2C-36FF-45F6-B41E-00F26D01AEC2}"/>
               </a:ext>
             </a:extLst>
           </p:cNvPr>
@@ -1706,7 +1706,7 @@
     </p:spTree>
     <p:extLst>
       <p:ext uri="{BB962C8B-B14F-4D97-AF65-F5344CB8AC3E}">
-        <p14:creationId xmlns:p14="http://schemas.microsoft.com/office/powerpoint/2010/main" val="1574438492"/>
+        <p14:creationId xmlns:p14="http://schemas.microsoft.com/office/powerpoint/2010/main" val="1037248129"/>
       </p:ext>
     </p:extLst>
   </p:cSld>
@@ -1741,7 +1741,7 @@
           <p:nvPr/>
         </p:nvPicPr>
         <p:blipFill>
-          <a:blip xmlns:r="http://schemas.openxmlformats.org/officeDocument/2006/relationships" xmlns:a="http://schemas.openxmlformats.org/drawingml/2006/main" r:embed="R2d6cd9afe2b745c6"/>
+          <a:blip xmlns:r="http://schemas.openxmlformats.org/officeDocument/2006/relationships" xmlns:a="http://schemas.openxmlformats.org/drawingml/2006/main" r:embed="Ra1bbc2c74c39420b"/>
           <a:stretch xmlns:a="http://schemas.openxmlformats.org/drawingml/2006/main"/>
         </p:blipFill>
         <p:spPr>
@@ -3030,7 +3030,7 @@
           <p:nvPr/>
         </p:nvPicPr>
         <p:blipFill>
-          <a:blip xmlns:r="http://schemas.openxmlformats.org/officeDocument/2006/relationships" xmlns:a="http://schemas.openxmlformats.org/drawingml/2006/main" r:embed="Rda7df439bf50445c"/>
+          <a:blip xmlns:r="http://schemas.openxmlformats.org/officeDocument/2006/relationships" xmlns:a="http://schemas.openxmlformats.org/drawingml/2006/main" r:embed="R15cac6f6e6ac4d8e"/>
           <a:stretch xmlns:a="http://schemas.openxmlformats.org/drawingml/2006/main"/>
         </p:blipFill>
         <p:spPr>
@@ -3162,7 +3162,7 @@
           <p:nvPr/>
         </p:nvPicPr>
         <p:blipFill>
-          <a:blip xmlns:r="http://schemas.openxmlformats.org/officeDocument/2006/relationships" xmlns:a="http://schemas.openxmlformats.org/drawingml/2006/main" r:embed="R86377f10b5094c84"/>
+          <a:blip xmlns:r="http://schemas.openxmlformats.org/officeDocument/2006/relationships" xmlns:a="http://schemas.openxmlformats.org/drawingml/2006/main" r:embed="Rb21785249e364dec"/>
           <a:stretch xmlns:a="http://schemas.openxmlformats.org/drawingml/2006/main"/>
         </p:blipFill>
         <p:spPr>
@@ -4953,7 +4953,7 @@
           <p:cNvPr id="38" name="">
             <a:extLst xmlns:a="http://schemas.openxmlformats.org/drawingml/2006/main">
               <a:ext uri="{FF2B5EF4-FFF2-40B4-BE49-F238E27FC236}">
-                <a16:creationId xmlns:a16="http://schemas.microsoft.com/office/drawing/2014/main" id="{06615CA6-4CBD-4CEE-BCDD-8EDA8906E705}"/>
+                <a16:creationId xmlns:a16="http://schemas.microsoft.com/office/drawing/2014/main" id="{BDF24398-C953-430F-929B-20376F1AE201}"/>
               </a:ext>
             </a:extLst>
           </p:cNvPr>

--- a/output/sections/02-背景与目标.pptx
+++ b/output/sections/02-背景与目标.pptx
@@ -2,15 +2,15 @@
 <file path=ppt/presentation.xml><?xml version="1.0" encoding="utf-8"?>
 <p:presentation xmlns:p="http://schemas.openxmlformats.org/presentationml/2006/main">
   <p:sldMasterIdLst>
-    <p:sldMasterId xmlns:r="http://schemas.openxmlformats.org/officeDocument/2006/relationships" id="2147483648" r:id="Re2e956aeb4704d02"/>
+    <p:sldMasterId xmlns:r="http://schemas.openxmlformats.org/officeDocument/2006/relationships" id="2147483648" r:id="R50dfb905b9e14247"/>
   </p:sldMasterIdLst>
   <p:notesMasterIdLst>
-    <p:notesMasterId xmlns:r="http://schemas.openxmlformats.org/officeDocument/2006/relationships" r:id="Rfe4893e2ef994fe2"/>
+    <p:notesMasterId xmlns:r="http://schemas.openxmlformats.org/officeDocument/2006/relationships" r:id="R6290f10962b1490f"/>
   </p:notesMasterIdLst>
   <p:sldIdLst>
-    <p:sldId xmlns:r="http://schemas.openxmlformats.org/officeDocument/2006/relationships" id="256" r:id="R01cb9b1e84f143f9"/>
-    <p:sldId xmlns:r="http://schemas.openxmlformats.org/officeDocument/2006/relationships" id="257" r:id="R69da80eddabd485d"/>
-    <p:sldId xmlns:r="http://schemas.openxmlformats.org/officeDocument/2006/relationships" id="258" r:id="R462dd78bbb7645eb"/>
+    <p:sldId xmlns:r="http://schemas.openxmlformats.org/officeDocument/2006/relationships" id="256" r:id="R9e74d23830b14178"/>
+    <p:sldId xmlns:r="http://schemas.openxmlformats.org/officeDocument/2006/relationships" id="257" r:id="R40180a71c1e848f8"/>
+    <p:sldId xmlns:r="http://schemas.openxmlformats.org/officeDocument/2006/relationships" id="258" r:id="Rdef5f64634d34a9d"/>
   </p:sldIdLst>
   <p:sldSz cx="12192000" cy="6858000"/>
   <p:notesSz cx="6858000" cy="9144000"/>
@@ -735,7 +735,7 @@
   </p:cSld>
   <p:clrMap bg1="lt1" tx1="dk1" bg2="lt2" tx2="dk2" accent1="accent1" accent2="accent2" accent3="accent3" accent4="accent4" accent5="accent5" accent6="accent6" hlink="hlink" folHlink="folHlink"/>
   <p:sldLayoutIdLst>
-    <p:sldLayoutId xmlns:r="http://schemas.openxmlformats.org/officeDocument/2006/relationships" id="2147483649" r:id="R41a8e53068874f5e"/>
+    <p:sldLayoutId xmlns:r="http://schemas.openxmlformats.org/officeDocument/2006/relationships" id="2147483649" r:id="R0a3e6306bd604ef5"/>
   </p:sldLayoutIdLst>
   <p:txStyles>
     <p:titleStyle>
@@ -1290,7 +1290,7 @@
           <p:nvPr/>
         </p:nvPicPr>
         <p:blipFill>
-          <a:blip xmlns:r="http://schemas.openxmlformats.org/officeDocument/2006/relationships" xmlns:a="http://schemas.openxmlformats.org/drawingml/2006/main" r:embed="Rad67b08968424a35"/>
+          <a:blip xmlns:r="http://schemas.openxmlformats.org/officeDocument/2006/relationships" xmlns:a="http://schemas.openxmlformats.org/drawingml/2006/main" r:embed="R82ae44cba1c44b70"/>
           <a:srcRect xmlns:a="http://schemas.openxmlformats.org/drawingml/2006/main" l="0" t="21875" r="0" b="21875"/>
           <a:stretch xmlns:a="http://schemas.openxmlformats.org/drawingml/2006/main">
             <a:fillRect l="0" t="0" r="0" b="0"/>
@@ -1311,7 +1311,7 @@
           <p:cNvPr id="2" name="">
             <a:extLst xmlns:a="http://schemas.openxmlformats.org/drawingml/2006/main">
               <a:ext uri="{FF2B5EF4-FFF2-40B4-BE49-F238E27FC236}">
-                <a16:creationId xmlns:a16="http://schemas.microsoft.com/office/drawing/2014/main" id="{BEE76648-E877-4368-9A2A-059A7FE925FA}"/>
+                <a16:creationId xmlns:a16="http://schemas.microsoft.com/office/drawing/2014/main" id="{65DDD602-3CB7-46E9-B8D8-447C51ACB784}"/>
               </a:ext>
             </a:extLst>
           </p:cNvPr>
@@ -1344,7 +1344,7 @@
           <p:cNvPr id="3" name="">
             <a:extLst xmlns:a="http://schemas.openxmlformats.org/drawingml/2006/main">
               <a:ext uri="{FF2B5EF4-FFF2-40B4-BE49-F238E27FC236}">
-                <a16:creationId xmlns:a16="http://schemas.microsoft.com/office/drawing/2014/main" id="{F853036D-85BC-4D5E-A0B3-F495D4ABEFFF}"/>
+                <a16:creationId xmlns:a16="http://schemas.microsoft.com/office/drawing/2014/main" id="{401FC9BE-8740-41B9-BFEF-4FF0E6602637}"/>
               </a:ext>
             </a:extLst>
           </p:cNvPr>
@@ -1379,7 +1379,7 @@
           <p:nvPr/>
         </p:nvPicPr>
         <p:blipFill>
-          <a:blip xmlns:r="http://schemas.openxmlformats.org/officeDocument/2006/relationships" xmlns:a="http://schemas.openxmlformats.org/drawingml/2006/main" r:embed="R34bd55215b4a47f0"/>
+          <a:blip xmlns:r="http://schemas.openxmlformats.org/officeDocument/2006/relationships" xmlns:a="http://schemas.openxmlformats.org/drawingml/2006/main" r:embed="R325f7f63c48d4c83"/>
           <a:stretch xmlns:a="http://schemas.openxmlformats.org/drawingml/2006/main"/>
         </p:blipFill>
         <p:spPr>
@@ -1397,7 +1397,7 @@
           <p:cNvPr id="5" name="">
             <a:extLst xmlns:a="http://schemas.openxmlformats.org/drawingml/2006/main">
               <a:ext uri="{FF2B5EF4-FFF2-40B4-BE49-F238E27FC236}">
-                <a16:creationId xmlns:a16="http://schemas.microsoft.com/office/drawing/2014/main" id="{663F86DF-C681-434F-AE29-F3AF987738D8}"/>
+                <a16:creationId xmlns:a16="http://schemas.microsoft.com/office/drawing/2014/main" id="{39FF06FB-CD83-403C-A1E7-991219A075F7}"/>
               </a:ext>
             </a:extLst>
           </p:cNvPr>
@@ -1453,7 +1453,7 @@
           <p:cNvPr id="6" name="">
             <a:extLst xmlns:a="http://schemas.openxmlformats.org/drawingml/2006/main">
               <a:ext uri="{FF2B5EF4-FFF2-40B4-BE49-F238E27FC236}">
-                <a16:creationId xmlns:a16="http://schemas.microsoft.com/office/drawing/2014/main" id="{A6904E59-B46C-493A-83B7-C505E2BEAF9E}"/>
+                <a16:creationId xmlns:a16="http://schemas.microsoft.com/office/drawing/2014/main" id="{EF39123B-D58E-4B54-8107-61D3E08F3D45}"/>
               </a:ext>
             </a:extLst>
           </p:cNvPr>
@@ -1509,7 +1509,7 @@
           <p:cNvPr id="7" name="">
             <a:extLst xmlns:a="http://schemas.openxmlformats.org/drawingml/2006/main">
               <a:ext uri="{FF2B5EF4-FFF2-40B4-BE49-F238E27FC236}">
-                <a16:creationId xmlns:a16="http://schemas.microsoft.com/office/drawing/2014/main" id="{F7250834-EEFE-4D37-BA33-2E119476EA7D}"/>
+                <a16:creationId xmlns:a16="http://schemas.microsoft.com/office/drawing/2014/main" id="{C36EB974-3C04-4ED1-929F-D38A47F3B598}"/>
               </a:ext>
             </a:extLst>
           </p:cNvPr>
@@ -1565,7 +1565,7 @@
           <p:cNvPr id="8" name="">
             <a:extLst xmlns:a="http://schemas.openxmlformats.org/drawingml/2006/main">
               <a:ext uri="{FF2B5EF4-FFF2-40B4-BE49-F238E27FC236}">
-                <a16:creationId xmlns:a16="http://schemas.microsoft.com/office/drawing/2014/main" id="{7520CDFA-542A-447C-BCBE-BC10C6F8EF9B}"/>
+                <a16:creationId xmlns:a16="http://schemas.microsoft.com/office/drawing/2014/main" id="{4A02D3A2-FACF-4D4A-BED6-A8E89465A60A}"/>
               </a:ext>
             </a:extLst>
           </p:cNvPr>
@@ -1621,7 +1621,7 @@
           <p:cNvPr id="9" name="">
             <a:extLst xmlns:a="http://schemas.openxmlformats.org/drawingml/2006/main">
               <a:ext uri="{FF2B5EF4-FFF2-40B4-BE49-F238E27FC236}">
-                <a16:creationId xmlns:a16="http://schemas.microsoft.com/office/drawing/2014/main" id="{08504A23-E32C-4460-8718-A18A6CA8CB88}"/>
+                <a16:creationId xmlns:a16="http://schemas.microsoft.com/office/drawing/2014/main" id="{B54F39D2-1B66-4989-BB72-660D8D129B5A}"/>
               </a:ext>
             </a:extLst>
           </p:cNvPr>
@@ -1652,7 +1652,7 @@
           <p:cNvPr id="10" name="">
             <a:extLst xmlns:a="http://schemas.openxmlformats.org/drawingml/2006/main">
               <a:ext uri="{FF2B5EF4-FFF2-40B4-BE49-F238E27FC236}">
-                <a16:creationId xmlns:a16="http://schemas.microsoft.com/office/drawing/2014/main" id="{BB14CE2C-36FF-45F6-B41E-00F26D01AEC2}"/>
+                <a16:creationId xmlns:a16="http://schemas.microsoft.com/office/drawing/2014/main" id="{4DD3FD42-C82C-45B7-9D55-90BF6B980F37}"/>
               </a:ext>
             </a:extLst>
           </p:cNvPr>
@@ -1706,7 +1706,7 @@
     </p:spTree>
     <p:extLst>
       <p:ext uri="{BB962C8B-B14F-4D97-AF65-F5344CB8AC3E}">
-        <p14:creationId xmlns:p14="http://schemas.microsoft.com/office/powerpoint/2010/main" val="1037248129"/>
+        <p14:creationId xmlns:p14="http://schemas.microsoft.com/office/powerpoint/2010/main" val="1272110781"/>
       </p:ext>
     </p:extLst>
   </p:cSld>
@@ -1734,14 +1734,14 @@
       </p:grpSpPr>
       <p:pic>
         <p:nvPicPr>
-          <p:cNvPr id="29" name=""/>
+          <p:cNvPr id="31" name=""/>
           <p:cNvPicPr>
             <a:picLocks xmlns:a="http://schemas.openxmlformats.org/drawingml/2006/main" noChangeAspect="1"/>
           </p:cNvPicPr>
           <p:nvPr/>
         </p:nvPicPr>
         <p:blipFill>
-          <a:blip xmlns:r="http://schemas.openxmlformats.org/officeDocument/2006/relationships" xmlns:a="http://schemas.openxmlformats.org/drawingml/2006/main" r:embed="Ra1bbc2c74c39420b"/>
+          <a:blip xmlns:r="http://schemas.openxmlformats.org/officeDocument/2006/relationships" xmlns:a="http://schemas.openxmlformats.org/drawingml/2006/main" r:embed="R80ed6b883f314d32"/>
           <a:stretch xmlns:a="http://schemas.openxmlformats.org/drawingml/2006/main"/>
         </p:blipFill>
         <p:spPr>
@@ -1960,94 +1960,6 @@
                 <a:cs typeface="PingFang SC"/>
               </a:rPr>
               <a:t>2</a:t>
-            </a:r>
-          </a:p>
-        </p:txBody>
-      </p:sp>
-      <p:sp>
-        <p:nvSpPr>
-          <p:cNvPr id="6" name="">
-            <a:extLst xmlns:a="http://schemas.openxmlformats.org/drawingml/2006/main">
-              <a:ext uri="{FF2B5EF4-FFF2-40B4-BE49-F238E27FC236}">
-                <a16:creationId xmlns:a16="http://schemas.microsoft.com/office/drawing/2014/main" id="{E33D8B6D-F3F5-43D0-B0F3-28639E40587B}"/>
-              </a:ext>
-            </a:extLst>
-          </p:cNvPr>
-          <p:cNvSpPr>
-            <a:spLocks xmlns:a="http://schemas.openxmlformats.org/drawingml/2006/main" noGrp="1"/>
-          </p:cNvSpPr>
-          <p:nvPr/>
-        </p:nvSpPr>
-        <p:spPr>
-          <a:xfrm xmlns:a="http://schemas.openxmlformats.org/drawingml/2006/main">
-            <a:off x="990600" y="400050"/>
-            <a:ext cx="6572250" cy="419100"/>
-          </a:xfrm>
-          <a:prstGeom xmlns:a="http://schemas.openxmlformats.org/drawingml/2006/main" prst="rect">
-            <a:avLst/>
-          </a:prstGeom>
-          <a:solidFill xmlns:a="http://schemas.openxmlformats.org/drawingml/2006/main">
-            <a:srgbClr val="635BFF"/>
-          </a:solidFill>
-          <a:ln xmlns:a="http://schemas.openxmlformats.org/drawingml/2006/main" w="0">
-            <a:noFill/>
-            <a:prstDash val="solid"/>
-          </a:ln>
-        </p:spPr>
-      </p:sp>
-      <p:sp>
-        <p:nvSpPr>
-          <p:cNvPr id="7" name="">
-            <a:extLst xmlns:a="http://schemas.openxmlformats.org/drawingml/2006/main">
-              <a:ext uri="{FF2B5EF4-FFF2-40B4-BE49-F238E27FC236}">
-                <a16:creationId xmlns:a16="http://schemas.microsoft.com/office/drawing/2014/main" id="{729ECC9C-7959-431F-A63E-33160D618920}"/>
-              </a:ext>
-            </a:extLst>
-          </p:cNvPr>
-          <p:cNvSpPr>
-            <a:spLocks xmlns:a="http://schemas.openxmlformats.org/drawingml/2006/main" noGrp="1"/>
-          </p:cNvSpPr>
-          <p:nvPr/>
-        </p:nvSpPr>
-        <p:spPr>
-          <a:xfrm xmlns:a="http://schemas.openxmlformats.org/drawingml/2006/main">
-            <a:off x="1257300" y="466725"/>
-            <a:ext cx="6038850" cy="266700"/>
-          </a:xfrm>
-          <a:prstGeom xmlns:a="http://schemas.openxmlformats.org/drawingml/2006/main" prst="rect">
-            <a:avLst/>
-          </a:prstGeom>
-          <a:noFill xmlns:a="http://schemas.openxmlformats.org/drawingml/2006/main"/>
-          <a:ln xmlns:a="http://schemas.openxmlformats.org/drawingml/2006/main" w="0">
-            <a:noFill/>
-            <a:prstDash val="solid"/>
-          </a:ln>
-        </p:spPr>
-        <p:txBody>
-          <a:bodyPr xmlns:a="http://schemas.openxmlformats.org/drawingml/2006/main" wrap="square" lIns="0" tIns="0" rIns="0" bIns="0"/>
-          <a:lstStyle xmlns:a="http://schemas.openxmlformats.org/drawingml/2006/main"/>
-          <a:p xmlns:a="http://schemas.openxmlformats.org/drawingml/2006/main">
-            <a:pPr algn="ctr">
-              <a:buNone/>
-              <a:defRPr sz="1800" b="1">
-                <a:solidFill>
-                  <a:srgbClr val="FFFFFF"/>
-                </a:solidFill>
-                <a:latin typeface="PingFang SC"/>
-                <a:ea typeface="PingFang SC"/>
-                <a:cs typeface="PingFang SC"/>
-              </a:defRPr>
-            </a:pPr>
-            <a:r>
-              <a:rPr sz="1800" b="1">
-                <a:solidFill>
-                  <a:srgbClr val="FFFFFF"/>
-                </a:solidFill>
-                <a:latin typeface="PingFang SC"/>
-                <a:ea typeface="PingFang SC"/>
-                <a:cs typeface="PingFang SC"/>
-              </a:rPr>
-              <a:t>背景与目标 | 为什么需要 OneRec</a:t>
             </a:r>
           </a:p>
         </p:txBody>
@@ -3030,7 +2942,7 @@
           <p:nvPr/>
         </p:nvPicPr>
         <p:blipFill>
-          <a:blip xmlns:r="http://schemas.openxmlformats.org/officeDocument/2006/relationships" xmlns:a="http://schemas.openxmlformats.org/drawingml/2006/main" r:embed="R15cac6f6e6ac4d8e"/>
+          <a:blip xmlns:r="http://schemas.openxmlformats.org/officeDocument/2006/relationships" xmlns:a="http://schemas.openxmlformats.org/drawingml/2006/main" r:embed="R44f91a0c4b474243"/>
           <a:stretch xmlns:a="http://schemas.openxmlformats.org/drawingml/2006/main"/>
         </p:blipFill>
         <p:spPr>
@@ -3120,6 +3032,95 @@
                 <a:cs typeface="PingFang SC"/>
               </a:rPr>
               <a:t>参照：显式推理、时延优化、评估闭环</a:t>
+            </a:r>
+          </a:p>
+        </p:txBody>
+      </p:sp>
+      <p:sp>
+        <p:nvSpPr>
+          <p:cNvPr id="29" name="">
+            <a:extLst xmlns:a="http://schemas.openxmlformats.org/drawingml/2006/main">
+              <a:ext uri="{FF2B5EF4-FFF2-40B4-BE49-F238E27FC236}">
+                <a16:creationId xmlns:a16="http://schemas.microsoft.com/office/drawing/2014/main" id="{3721F395-B707-43CD-A570-ECF3F59DD61C}"/>
+              </a:ext>
+            </a:extLst>
+          </p:cNvPr>
+          <p:cNvSpPr>
+            <a:spLocks xmlns:a="http://schemas.openxmlformats.org/drawingml/2006/main" noGrp="1"/>
+          </p:cNvSpPr>
+          <p:nvPr/>
+        </p:nvSpPr>
+        <p:spPr>
+          <a:xfrm xmlns:a="http://schemas.openxmlformats.org/drawingml/2006/main">
+            <a:off x="1162050" y="400050"/>
+            <a:ext cx="6400800" cy="419100"/>
+          </a:xfrm>
+          <a:prstGeom xmlns:a="http://schemas.openxmlformats.org/drawingml/2006/main" prst="roundRect">
+            <a:avLst>
+              <a:gd name="adj" fmla="val 18182"/>
+            </a:avLst>
+          </a:prstGeom>
+          <a:solidFill xmlns:a="http://schemas.openxmlformats.org/drawingml/2006/main">
+            <a:srgbClr val="635BFF"/>
+          </a:solidFill>
+          <a:ln xmlns:a="http://schemas.openxmlformats.org/drawingml/2006/main" w="0">
+            <a:noFill/>
+            <a:prstDash val="solid"/>
+          </a:ln>
+        </p:spPr>
+      </p:sp>
+      <p:sp>
+        <p:nvSpPr>
+          <p:cNvPr id="30" name="">
+            <a:extLst xmlns:a="http://schemas.openxmlformats.org/drawingml/2006/main">
+              <a:ext uri="{FF2B5EF4-FFF2-40B4-BE49-F238E27FC236}">
+                <a16:creationId xmlns:a16="http://schemas.microsoft.com/office/drawing/2014/main" id="{3E15EC33-66FC-426F-90C1-115E780E3BF3}"/>
+              </a:ext>
+            </a:extLst>
+          </p:cNvPr>
+          <p:cNvSpPr>
+            <a:spLocks xmlns:a="http://schemas.openxmlformats.org/drawingml/2006/main" noGrp="1"/>
+          </p:cNvSpPr>
+          <p:nvPr/>
+        </p:nvSpPr>
+        <p:spPr>
+          <a:xfrm xmlns:a="http://schemas.openxmlformats.org/drawingml/2006/main">
+            <a:off x="1333500" y="466725"/>
+            <a:ext cx="6057900" cy="266700"/>
+          </a:xfrm>
+          <a:prstGeom xmlns:a="http://schemas.openxmlformats.org/drawingml/2006/main" prst="rect">
+            <a:avLst/>
+          </a:prstGeom>
+          <a:noFill xmlns:a="http://schemas.openxmlformats.org/drawingml/2006/main"/>
+          <a:ln xmlns:a="http://schemas.openxmlformats.org/drawingml/2006/main" w="0">
+            <a:noFill/>
+            <a:prstDash val="solid"/>
+          </a:ln>
+        </p:spPr>
+        <p:txBody>
+          <a:bodyPr xmlns:a="http://schemas.openxmlformats.org/drawingml/2006/main" wrap="square" lIns="0" tIns="0" rIns="0" bIns="0"/>
+          <a:lstStyle xmlns:a="http://schemas.openxmlformats.org/drawingml/2006/main"/>
+          <a:p xmlns:a="http://schemas.openxmlformats.org/drawingml/2006/main">
+            <a:pPr algn="ctr">
+              <a:defRPr sz="1800" b="1">
+                <a:solidFill>
+                  <a:srgbClr val="FFFFFF"/>
+                </a:solidFill>
+                <a:latin typeface="PingFang SC"/>
+                <a:ea typeface="PingFang SC"/>
+                <a:cs typeface="PingFang SC"/>
+              </a:defRPr>
+            </a:pPr>
+            <a:r>
+              <a:rPr sz="1800" b="1">
+                <a:solidFill>
+                  <a:srgbClr val="FFFFFF"/>
+                </a:solidFill>
+                <a:latin typeface="PingFang SC"/>
+                <a:ea typeface="PingFang SC"/>
+                <a:cs typeface="PingFang SC"/>
+              </a:rPr>
+              <a:t>背景与目标 | 为什么需要 OneRec</a:t>
             </a:r>
           </a:p>
         </p:txBody>
@@ -3155,14 +3156,14 @@
       </p:grpSpPr>
       <p:pic>
         <p:nvPicPr>
-          <p:cNvPr id="39" name=""/>
+          <p:cNvPr id="41" name=""/>
           <p:cNvPicPr>
             <a:picLocks xmlns:a="http://schemas.openxmlformats.org/drawingml/2006/main" noChangeAspect="1"/>
           </p:cNvPicPr>
           <p:nvPr/>
         </p:nvPicPr>
         <p:blipFill>
-          <a:blip xmlns:r="http://schemas.openxmlformats.org/officeDocument/2006/relationships" xmlns:a="http://schemas.openxmlformats.org/drawingml/2006/main" r:embed="Rb21785249e364dec"/>
+          <a:blip xmlns:r="http://schemas.openxmlformats.org/officeDocument/2006/relationships" xmlns:a="http://schemas.openxmlformats.org/drawingml/2006/main" r:embed="R6a7f2f2a22a84ebe"/>
           <a:stretch xmlns:a="http://schemas.openxmlformats.org/drawingml/2006/main"/>
         </p:blipFill>
         <p:spPr>
@@ -3381,94 +3382,6 @@
                 <a:cs typeface="PingFang SC"/>
               </a:rPr>
               <a:t>2</a:t>
-            </a:r>
-          </a:p>
-        </p:txBody>
-      </p:sp>
-      <p:sp>
-        <p:nvSpPr>
-          <p:cNvPr id="6" name="">
-            <a:extLst xmlns:a="http://schemas.openxmlformats.org/drawingml/2006/main">
-              <a:ext uri="{FF2B5EF4-FFF2-40B4-BE49-F238E27FC236}">
-                <a16:creationId xmlns:a16="http://schemas.microsoft.com/office/drawing/2014/main" id="{33BD86EE-C7DE-4543-A6F8-DB203A9D6A83}"/>
-              </a:ext>
-            </a:extLst>
-          </p:cNvPr>
-          <p:cNvSpPr>
-            <a:spLocks xmlns:a="http://schemas.openxmlformats.org/drawingml/2006/main" noGrp="1"/>
-          </p:cNvSpPr>
-          <p:nvPr/>
-        </p:nvSpPr>
-        <p:spPr>
-          <a:xfrm xmlns:a="http://schemas.openxmlformats.org/drawingml/2006/main">
-            <a:off x="990600" y="400050"/>
-            <a:ext cx="6572250" cy="419100"/>
-          </a:xfrm>
-          <a:prstGeom xmlns:a="http://schemas.openxmlformats.org/drawingml/2006/main" prst="rect">
-            <a:avLst/>
-          </a:prstGeom>
-          <a:solidFill xmlns:a="http://schemas.openxmlformats.org/drawingml/2006/main">
-            <a:srgbClr val="635BFF"/>
-          </a:solidFill>
-          <a:ln xmlns:a="http://schemas.openxmlformats.org/drawingml/2006/main" w="0">
-            <a:noFill/>
-            <a:prstDash val="solid"/>
-          </a:ln>
-        </p:spPr>
-      </p:sp>
-      <p:sp>
-        <p:nvSpPr>
-          <p:cNvPr id="7" name="">
-            <a:extLst xmlns:a="http://schemas.openxmlformats.org/drawingml/2006/main">
-              <a:ext uri="{FF2B5EF4-FFF2-40B4-BE49-F238E27FC236}">
-                <a16:creationId xmlns:a16="http://schemas.microsoft.com/office/drawing/2014/main" id="{3B3D07C3-CF29-4CD2-BA31-067B3680B6FE}"/>
-              </a:ext>
-            </a:extLst>
-          </p:cNvPr>
-          <p:cNvSpPr>
-            <a:spLocks xmlns:a="http://schemas.openxmlformats.org/drawingml/2006/main" noGrp="1"/>
-          </p:cNvSpPr>
-          <p:nvPr/>
-        </p:nvSpPr>
-        <p:spPr>
-          <a:xfrm xmlns:a="http://schemas.openxmlformats.org/drawingml/2006/main">
-            <a:off x="1257300" y="466725"/>
-            <a:ext cx="6038850" cy="266700"/>
-          </a:xfrm>
-          <a:prstGeom xmlns:a="http://schemas.openxmlformats.org/drawingml/2006/main" prst="rect">
-            <a:avLst/>
-          </a:prstGeom>
-          <a:noFill xmlns:a="http://schemas.openxmlformats.org/drawingml/2006/main"/>
-          <a:ln xmlns:a="http://schemas.openxmlformats.org/drawingml/2006/main" w="0">
-            <a:noFill/>
-            <a:prstDash val="solid"/>
-          </a:ln>
-        </p:spPr>
-        <p:txBody>
-          <a:bodyPr xmlns:a="http://schemas.openxmlformats.org/drawingml/2006/main" wrap="square" lIns="0" tIns="0" rIns="0" bIns="0"/>
-          <a:lstStyle xmlns:a="http://schemas.openxmlformats.org/drawingml/2006/main"/>
-          <a:p xmlns:a="http://schemas.openxmlformats.org/drawingml/2006/main">
-            <a:pPr algn="ctr">
-              <a:buNone/>
-              <a:defRPr sz="1800" b="1">
-                <a:solidFill>
-                  <a:srgbClr val="FFFFFF"/>
-                </a:solidFill>
-                <a:latin typeface="PingFang SC"/>
-                <a:ea typeface="PingFang SC"/>
-                <a:cs typeface="PingFang SC"/>
-              </a:defRPr>
-            </a:pPr>
-            <a:r>
-              <a:rPr sz="1800" b="1">
-                <a:solidFill>
-                  <a:srgbClr val="FFFFFF"/>
-                </a:solidFill>
-                <a:latin typeface="PingFang SC"/>
-                <a:ea typeface="PingFang SC"/>
-                <a:cs typeface="PingFang SC"/>
-              </a:rPr>
-              <a:t>背景与目标 | 教育 OneRec 基座模型</a:t>
             </a:r>
           </a:p>
         </p:txBody>
@@ -4953,7 +4866,7 @@
           <p:cNvPr id="38" name="">
             <a:extLst xmlns:a="http://schemas.openxmlformats.org/drawingml/2006/main">
               <a:ext uri="{FF2B5EF4-FFF2-40B4-BE49-F238E27FC236}">
-                <a16:creationId xmlns:a16="http://schemas.microsoft.com/office/drawing/2014/main" id="{BDF24398-C953-430F-929B-20376F1AE201}"/>
+                <a16:creationId xmlns:a16="http://schemas.microsoft.com/office/drawing/2014/main" id="{296DE484-DA79-4DF8-A41E-191A6B989236}"/>
               </a:ext>
             </a:extLst>
           </p:cNvPr>
@@ -5000,6 +4913,95 @@
                 <a:cs typeface="PingFang SC"/>
               </a:rPr>
               <a:t>问题与挑战</a:t>
+            </a:r>
+          </a:p>
+        </p:txBody>
+      </p:sp>
+      <p:sp>
+        <p:nvSpPr>
+          <p:cNvPr id="39" name="">
+            <a:extLst xmlns:a="http://schemas.openxmlformats.org/drawingml/2006/main">
+              <a:ext uri="{FF2B5EF4-FFF2-40B4-BE49-F238E27FC236}">
+                <a16:creationId xmlns:a16="http://schemas.microsoft.com/office/drawing/2014/main" id="{FC5B07FD-EF80-4673-A0F4-F48792C39E32}"/>
+              </a:ext>
+            </a:extLst>
+          </p:cNvPr>
+          <p:cNvSpPr>
+            <a:spLocks xmlns:a="http://schemas.openxmlformats.org/drawingml/2006/main" noGrp="1"/>
+          </p:cNvSpPr>
+          <p:nvPr/>
+        </p:nvSpPr>
+        <p:spPr>
+          <a:xfrm xmlns:a="http://schemas.openxmlformats.org/drawingml/2006/main">
+            <a:off x="1162050" y="400050"/>
+            <a:ext cx="6400800" cy="419100"/>
+          </a:xfrm>
+          <a:prstGeom xmlns:a="http://schemas.openxmlformats.org/drawingml/2006/main" prst="roundRect">
+            <a:avLst>
+              <a:gd name="adj" fmla="val 18182"/>
+            </a:avLst>
+          </a:prstGeom>
+          <a:solidFill xmlns:a="http://schemas.openxmlformats.org/drawingml/2006/main">
+            <a:srgbClr val="635BFF"/>
+          </a:solidFill>
+          <a:ln xmlns:a="http://schemas.openxmlformats.org/drawingml/2006/main" w="0">
+            <a:noFill/>
+            <a:prstDash val="solid"/>
+          </a:ln>
+        </p:spPr>
+      </p:sp>
+      <p:sp>
+        <p:nvSpPr>
+          <p:cNvPr id="40" name="">
+            <a:extLst xmlns:a="http://schemas.openxmlformats.org/drawingml/2006/main">
+              <a:ext uri="{FF2B5EF4-FFF2-40B4-BE49-F238E27FC236}">
+                <a16:creationId xmlns:a16="http://schemas.microsoft.com/office/drawing/2014/main" id="{8AB133BA-5CF8-4F61-944B-9EEA6D87A58B}"/>
+              </a:ext>
+            </a:extLst>
+          </p:cNvPr>
+          <p:cNvSpPr>
+            <a:spLocks xmlns:a="http://schemas.openxmlformats.org/drawingml/2006/main" noGrp="1"/>
+          </p:cNvSpPr>
+          <p:nvPr/>
+        </p:nvSpPr>
+        <p:spPr>
+          <a:xfrm xmlns:a="http://schemas.openxmlformats.org/drawingml/2006/main">
+            <a:off x="1333500" y="466725"/>
+            <a:ext cx="6057900" cy="266700"/>
+          </a:xfrm>
+          <a:prstGeom xmlns:a="http://schemas.openxmlformats.org/drawingml/2006/main" prst="rect">
+            <a:avLst/>
+          </a:prstGeom>
+          <a:noFill xmlns:a="http://schemas.openxmlformats.org/drawingml/2006/main"/>
+          <a:ln xmlns:a="http://schemas.openxmlformats.org/drawingml/2006/main" w="0">
+            <a:noFill/>
+            <a:prstDash val="solid"/>
+          </a:ln>
+        </p:spPr>
+        <p:txBody>
+          <a:bodyPr xmlns:a="http://schemas.openxmlformats.org/drawingml/2006/main" wrap="square" lIns="0" tIns="0" rIns="0" bIns="0"/>
+          <a:lstStyle xmlns:a="http://schemas.openxmlformats.org/drawingml/2006/main"/>
+          <a:p xmlns:a="http://schemas.openxmlformats.org/drawingml/2006/main">
+            <a:pPr algn="ctr">
+              <a:defRPr sz="1800" b="1">
+                <a:solidFill>
+                  <a:srgbClr val="FFFFFF"/>
+                </a:solidFill>
+                <a:latin typeface="PingFang SC"/>
+                <a:ea typeface="PingFang SC"/>
+                <a:cs typeface="PingFang SC"/>
+              </a:defRPr>
+            </a:pPr>
+            <a:r>
+              <a:rPr sz="1800" b="1">
+                <a:solidFill>
+                  <a:srgbClr val="FFFFFF"/>
+                </a:solidFill>
+                <a:latin typeface="PingFang SC"/>
+                <a:ea typeface="PingFang SC"/>
+                <a:cs typeface="PingFang SC"/>
+              </a:rPr>
+              <a:t>背景与目标 | 教育 OneRec 基座模型</a:t>
             </a:r>
           </a:p>
         </p:txBody>

--- a/output/sections/02-背景与目标.pptx
+++ b/output/sections/02-背景与目标.pptx
@@ -2,15 +2,15 @@
 <file path=ppt/presentation.xml><?xml version="1.0" encoding="utf-8"?>
 <p:presentation xmlns:p="http://schemas.openxmlformats.org/presentationml/2006/main">
   <p:sldMasterIdLst>
-    <p:sldMasterId xmlns:r="http://schemas.openxmlformats.org/officeDocument/2006/relationships" id="2147483648" r:id="R50dfb905b9e14247"/>
+    <p:sldMasterId xmlns:r="http://schemas.openxmlformats.org/officeDocument/2006/relationships" id="2147483648" r:id="Ree94f0f6c0cd4413"/>
   </p:sldMasterIdLst>
   <p:notesMasterIdLst>
-    <p:notesMasterId xmlns:r="http://schemas.openxmlformats.org/officeDocument/2006/relationships" r:id="R6290f10962b1490f"/>
+    <p:notesMasterId xmlns:r="http://schemas.openxmlformats.org/officeDocument/2006/relationships" r:id="R41db815840e543f7"/>
   </p:notesMasterIdLst>
   <p:sldIdLst>
-    <p:sldId xmlns:r="http://schemas.openxmlformats.org/officeDocument/2006/relationships" id="256" r:id="R9e74d23830b14178"/>
-    <p:sldId xmlns:r="http://schemas.openxmlformats.org/officeDocument/2006/relationships" id="257" r:id="R40180a71c1e848f8"/>
-    <p:sldId xmlns:r="http://schemas.openxmlformats.org/officeDocument/2006/relationships" id="258" r:id="Rdef5f64634d34a9d"/>
+    <p:sldId xmlns:r="http://schemas.openxmlformats.org/officeDocument/2006/relationships" id="256" r:id="Rb9a45cd244964c59"/>
+    <p:sldId xmlns:r="http://schemas.openxmlformats.org/officeDocument/2006/relationships" id="257" r:id="R1664302ff65c47c0"/>
+    <p:sldId xmlns:r="http://schemas.openxmlformats.org/officeDocument/2006/relationships" id="258" r:id="R7258c284b6c049be"/>
   </p:sldIdLst>
   <p:sldSz cx="12192000" cy="6858000"/>
   <p:notesSz cx="6858000" cy="9144000"/>
@@ -735,7 +735,7 @@
   </p:cSld>
   <p:clrMap bg1="lt1" tx1="dk1" bg2="lt2" tx2="dk2" accent1="accent1" accent2="accent2" accent3="accent3" accent4="accent4" accent5="accent5" accent6="accent6" hlink="hlink" folHlink="folHlink"/>
   <p:sldLayoutIdLst>
-    <p:sldLayoutId xmlns:r="http://schemas.openxmlformats.org/officeDocument/2006/relationships" id="2147483649" r:id="R0a3e6306bd604ef5"/>
+    <p:sldLayoutId xmlns:r="http://schemas.openxmlformats.org/officeDocument/2006/relationships" id="2147483649" r:id="R21d96564d4cf4c1d"/>
   </p:sldLayoutIdLst>
   <p:txStyles>
     <p:titleStyle>
@@ -1290,7 +1290,7 @@
           <p:nvPr/>
         </p:nvPicPr>
         <p:blipFill>
-          <a:blip xmlns:r="http://schemas.openxmlformats.org/officeDocument/2006/relationships" xmlns:a="http://schemas.openxmlformats.org/drawingml/2006/main" r:embed="R82ae44cba1c44b70"/>
+          <a:blip xmlns:r="http://schemas.openxmlformats.org/officeDocument/2006/relationships" xmlns:a="http://schemas.openxmlformats.org/drawingml/2006/main" r:embed="Re880975deec7476d"/>
           <a:srcRect xmlns:a="http://schemas.openxmlformats.org/drawingml/2006/main" l="0" t="21875" r="0" b="21875"/>
           <a:stretch xmlns:a="http://schemas.openxmlformats.org/drawingml/2006/main">
             <a:fillRect l="0" t="0" r="0" b="0"/>
@@ -1311,7 +1311,7 @@
           <p:cNvPr id="2" name="">
             <a:extLst xmlns:a="http://schemas.openxmlformats.org/drawingml/2006/main">
               <a:ext uri="{FF2B5EF4-FFF2-40B4-BE49-F238E27FC236}">
-                <a16:creationId xmlns:a16="http://schemas.microsoft.com/office/drawing/2014/main" id="{65DDD602-3CB7-46E9-B8D8-447C51ACB784}"/>
+                <a16:creationId xmlns:a16="http://schemas.microsoft.com/office/drawing/2014/main" id="{EE7C3AE9-B348-48C8-9191-B333CA20AEEF}"/>
               </a:ext>
             </a:extLst>
           </p:cNvPr>
@@ -1344,7 +1344,7 @@
           <p:cNvPr id="3" name="">
             <a:extLst xmlns:a="http://schemas.openxmlformats.org/drawingml/2006/main">
               <a:ext uri="{FF2B5EF4-FFF2-40B4-BE49-F238E27FC236}">
-                <a16:creationId xmlns:a16="http://schemas.microsoft.com/office/drawing/2014/main" id="{401FC9BE-8740-41B9-BFEF-4FF0E6602637}"/>
+                <a16:creationId xmlns:a16="http://schemas.microsoft.com/office/drawing/2014/main" id="{36044381-E518-4A70-83F4-E051CF9CCBD9}"/>
               </a:ext>
             </a:extLst>
           </p:cNvPr>
@@ -1379,7 +1379,7 @@
           <p:nvPr/>
         </p:nvPicPr>
         <p:blipFill>
-          <a:blip xmlns:r="http://schemas.openxmlformats.org/officeDocument/2006/relationships" xmlns:a="http://schemas.openxmlformats.org/drawingml/2006/main" r:embed="R325f7f63c48d4c83"/>
+          <a:blip xmlns:r="http://schemas.openxmlformats.org/officeDocument/2006/relationships" xmlns:a="http://schemas.openxmlformats.org/drawingml/2006/main" r:embed="R9dc641147b154b8b"/>
           <a:stretch xmlns:a="http://schemas.openxmlformats.org/drawingml/2006/main"/>
         </p:blipFill>
         <p:spPr>
@@ -1397,7 +1397,7 @@
           <p:cNvPr id="5" name="">
             <a:extLst xmlns:a="http://schemas.openxmlformats.org/drawingml/2006/main">
               <a:ext uri="{FF2B5EF4-FFF2-40B4-BE49-F238E27FC236}">
-                <a16:creationId xmlns:a16="http://schemas.microsoft.com/office/drawing/2014/main" id="{39FF06FB-CD83-403C-A1E7-991219A075F7}"/>
+                <a16:creationId xmlns:a16="http://schemas.microsoft.com/office/drawing/2014/main" id="{F9C19BFA-253C-4D9F-BA30-5EF27487B413}"/>
               </a:ext>
             </a:extLst>
           </p:cNvPr>
@@ -1453,7 +1453,7 @@
           <p:cNvPr id="6" name="">
             <a:extLst xmlns:a="http://schemas.openxmlformats.org/drawingml/2006/main">
               <a:ext uri="{FF2B5EF4-FFF2-40B4-BE49-F238E27FC236}">
-                <a16:creationId xmlns:a16="http://schemas.microsoft.com/office/drawing/2014/main" id="{EF39123B-D58E-4B54-8107-61D3E08F3D45}"/>
+                <a16:creationId xmlns:a16="http://schemas.microsoft.com/office/drawing/2014/main" id="{E40B98C9-384C-4B9E-BB65-B86679AEC809}"/>
               </a:ext>
             </a:extLst>
           </p:cNvPr>
@@ -1509,7 +1509,7 @@
           <p:cNvPr id="7" name="">
             <a:extLst xmlns:a="http://schemas.openxmlformats.org/drawingml/2006/main">
               <a:ext uri="{FF2B5EF4-FFF2-40B4-BE49-F238E27FC236}">
-                <a16:creationId xmlns:a16="http://schemas.microsoft.com/office/drawing/2014/main" id="{C36EB974-3C04-4ED1-929F-D38A47F3B598}"/>
+                <a16:creationId xmlns:a16="http://schemas.microsoft.com/office/drawing/2014/main" id="{D036E9F6-0DE7-47A3-ACDF-7A4A949C9AB4}"/>
               </a:ext>
             </a:extLst>
           </p:cNvPr>
@@ -1565,7 +1565,7 @@
           <p:cNvPr id="8" name="">
             <a:extLst xmlns:a="http://schemas.openxmlformats.org/drawingml/2006/main">
               <a:ext uri="{FF2B5EF4-FFF2-40B4-BE49-F238E27FC236}">
-                <a16:creationId xmlns:a16="http://schemas.microsoft.com/office/drawing/2014/main" id="{4A02D3A2-FACF-4D4A-BED6-A8E89465A60A}"/>
+                <a16:creationId xmlns:a16="http://schemas.microsoft.com/office/drawing/2014/main" id="{C28F4A7D-A061-480A-B46F-08E75E2A9A7B}"/>
               </a:ext>
             </a:extLst>
           </p:cNvPr>
@@ -1621,7 +1621,7 @@
           <p:cNvPr id="9" name="">
             <a:extLst xmlns:a="http://schemas.openxmlformats.org/drawingml/2006/main">
               <a:ext uri="{FF2B5EF4-FFF2-40B4-BE49-F238E27FC236}">
-                <a16:creationId xmlns:a16="http://schemas.microsoft.com/office/drawing/2014/main" id="{B54F39D2-1B66-4989-BB72-660D8D129B5A}"/>
+                <a16:creationId xmlns:a16="http://schemas.microsoft.com/office/drawing/2014/main" id="{5CF5FC24-190C-4CB5-B85C-AD7D2A347B37}"/>
               </a:ext>
             </a:extLst>
           </p:cNvPr>
@@ -1652,7 +1652,7 @@
           <p:cNvPr id="10" name="">
             <a:extLst xmlns:a="http://schemas.openxmlformats.org/drawingml/2006/main">
               <a:ext uri="{FF2B5EF4-FFF2-40B4-BE49-F238E27FC236}">
-                <a16:creationId xmlns:a16="http://schemas.microsoft.com/office/drawing/2014/main" id="{4DD3FD42-C82C-45B7-9D55-90BF6B980F37}"/>
+                <a16:creationId xmlns:a16="http://schemas.microsoft.com/office/drawing/2014/main" id="{27AFD06A-474C-4920-94C3-141A747163E6}"/>
               </a:ext>
             </a:extLst>
           </p:cNvPr>
@@ -1706,7 +1706,7 @@
     </p:spTree>
     <p:extLst>
       <p:ext uri="{BB962C8B-B14F-4D97-AF65-F5344CB8AC3E}">
-        <p14:creationId xmlns:p14="http://schemas.microsoft.com/office/powerpoint/2010/main" val="1272110781"/>
+        <p14:creationId xmlns:p14="http://schemas.microsoft.com/office/powerpoint/2010/main" val="2082095399"/>
       </p:ext>
     </p:extLst>
   </p:cSld>
@@ -1741,7 +1741,7 @@
           <p:nvPr/>
         </p:nvPicPr>
         <p:blipFill>
-          <a:blip xmlns:r="http://schemas.openxmlformats.org/officeDocument/2006/relationships" xmlns:a="http://schemas.openxmlformats.org/drawingml/2006/main" r:embed="R80ed6b883f314d32"/>
+          <a:blip xmlns:r="http://schemas.openxmlformats.org/officeDocument/2006/relationships" xmlns:a="http://schemas.openxmlformats.org/drawingml/2006/main" r:embed="R33e3d24207394410"/>
           <a:stretch xmlns:a="http://schemas.openxmlformats.org/drawingml/2006/main"/>
         </p:blipFill>
         <p:spPr>
@@ -2452,7 +2452,7 @@
                 <a:ea typeface="PingFang SC"/>
                 <a:cs typeface="PingFang SC"/>
               </a:rPr>
-              <a:t>• 秒级/十秒级时延，成本随复杂度增长</a:t>
+              <a:t>• 分钟级时延，成本随复杂度增长</a:t>
             </a:r>
           </a:p>
         </p:txBody>
@@ -2942,7 +2942,7 @@
           <p:nvPr/>
         </p:nvPicPr>
         <p:blipFill>
-          <a:blip xmlns:r="http://schemas.openxmlformats.org/officeDocument/2006/relationships" xmlns:a="http://schemas.openxmlformats.org/drawingml/2006/main" r:embed="R44f91a0c4b474243"/>
+          <a:blip xmlns:r="http://schemas.openxmlformats.org/officeDocument/2006/relationships" xmlns:a="http://schemas.openxmlformats.org/drawingml/2006/main" r:embed="Rf851d4076201492a"/>
           <a:stretch xmlns:a="http://schemas.openxmlformats.org/drawingml/2006/main"/>
         </p:blipFill>
         <p:spPr>
@@ -3041,7 +3041,7 @@
           <p:cNvPr id="29" name="">
             <a:extLst xmlns:a="http://schemas.openxmlformats.org/drawingml/2006/main">
               <a:ext uri="{FF2B5EF4-FFF2-40B4-BE49-F238E27FC236}">
-                <a16:creationId xmlns:a16="http://schemas.microsoft.com/office/drawing/2014/main" id="{3721F395-B707-43CD-A570-ECF3F59DD61C}"/>
+                <a16:creationId xmlns:a16="http://schemas.microsoft.com/office/drawing/2014/main" id="{9FB83DD8-AC9B-4E7D-BB81-F2C2878E4826}"/>
               </a:ext>
             </a:extLst>
           </p:cNvPr>
@@ -3074,7 +3074,7 @@
           <p:cNvPr id="30" name="">
             <a:extLst xmlns:a="http://schemas.openxmlformats.org/drawingml/2006/main">
               <a:ext uri="{FF2B5EF4-FFF2-40B4-BE49-F238E27FC236}">
-                <a16:creationId xmlns:a16="http://schemas.microsoft.com/office/drawing/2014/main" id="{3E15EC33-66FC-426F-90C1-115E780E3BF3}"/>
+                <a16:creationId xmlns:a16="http://schemas.microsoft.com/office/drawing/2014/main" id="{562E53FF-7A74-4445-86AF-9D42B62F3250}"/>
               </a:ext>
             </a:extLst>
           </p:cNvPr>
@@ -3163,7 +3163,7 @@
           <p:nvPr/>
         </p:nvPicPr>
         <p:blipFill>
-          <a:blip xmlns:r="http://schemas.openxmlformats.org/officeDocument/2006/relationships" xmlns:a="http://schemas.openxmlformats.org/drawingml/2006/main" r:embed="R6a7f2f2a22a84ebe"/>
+          <a:blip xmlns:r="http://schemas.openxmlformats.org/officeDocument/2006/relationships" xmlns:a="http://schemas.openxmlformats.org/drawingml/2006/main" r:embed="R08a4182fac0e4c60"/>
           <a:stretch xmlns:a="http://schemas.openxmlformats.org/drawingml/2006/main"/>
         </p:blipFill>
         <p:spPr>
@@ -4866,7 +4866,7 @@
           <p:cNvPr id="38" name="">
             <a:extLst xmlns:a="http://schemas.openxmlformats.org/drawingml/2006/main">
               <a:ext uri="{FF2B5EF4-FFF2-40B4-BE49-F238E27FC236}">
-                <a16:creationId xmlns:a16="http://schemas.microsoft.com/office/drawing/2014/main" id="{296DE484-DA79-4DF8-A41E-191A6B989236}"/>
+                <a16:creationId xmlns:a16="http://schemas.microsoft.com/office/drawing/2014/main" id="{AB6568D3-8EAE-4FA0-A186-BE807BB7EFFE}"/>
               </a:ext>
             </a:extLst>
           </p:cNvPr>
@@ -4922,7 +4922,7 @@
           <p:cNvPr id="39" name="">
             <a:extLst xmlns:a="http://schemas.openxmlformats.org/drawingml/2006/main">
               <a:ext uri="{FF2B5EF4-FFF2-40B4-BE49-F238E27FC236}">
-                <a16:creationId xmlns:a16="http://schemas.microsoft.com/office/drawing/2014/main" id="{FC5B07FD-EF80-4673-A0F4-F48792C39E32}"/>
+                <a16:creationId xmlns:a16="http://schemas.microsoft.com/office/drawing/2014/main" id="{37A4ACE9-FAC2-4452-8057-B4A5A59FF33E}"/>
               </a:ext>
             </a:extLst>
           </p:cNvPr>
@@ -4955,7 +4955,7 @@
           <p:cNvPr id="40" name="">
             <a:extLst xmlns:a="http://schemas.openxmlformats.org/drawingml/2006/main">
               <a:ext uri="{FF2B5EF4-FFF2-40B4-BE49-F238E27FC236}">
-                <a16:creationId xmlns:a16="http://schemas.microsoft.com/office/drawing/2014/main" id="{8AB133BA-5CF8-4F61-944B-9EEA6D87A58B}"/>
+                <a16:creationId xmlns:a16="http://schemas.microsoft.com/office/drawing/2014/main" id="{DFAE683A-662E-4CAC-B45C-1F6791D179DF}"/>
               </a:ext>
             </a:extLst>
           </p:cNvPr>
